--- a/docs/meetings/TSAT_Production_Store_Coordination_2026-09-25.pptx
+++ b/docs/meetings/TSAT_Production_Store_Coordination_2026-09-25.pptx
@@ -3095,264 +3095,240 @@
         <p:nvPr/>
       </p:nvGrpSpPr>
       <p:grpSpPr/>
+      <p:sp>
+        <p:nvSpPr>
+          <p:cNvPr id="4" name="TextBox 3"/>
+          <p:cNvSpPr txBox="1"/>
+          <p:nvPr/>
+        </p:nvSpPr>
+        <p:spPr>
+          <a:xfrm>
+            <a:off x="914400" y="2514600"/>
+            <a:ext cx="10332720" cy="1005840"/>
+          </a:xfrm>
+          <a:prstGeom prst="rect">
+            <a:avLst/>
+          </a:prstGeom>
+          <a:noFill/>
+        </p:spPr>
+        <p:txBody>
+          <a:bodyPr wrap="square" anchor="t" lIns="27432" rIns="27432" tIns="9144" bIns="9144">
+            <a:spAutoFit/>
+          </a:bodyPr>
+          <a:lstStyle/>
+          <a:p>
+            <a:pPr algn="l">
+              <a:spcBef>
+                <a:spcPts val="0"/>
+              </a:spcBef>
+              <a:spcAft>
+                <a:spcPts val="200"/>
+              </a:spcAft>
+            </a:pPr>
+            <a:r>
+              <a:rPr sz="4400" b="1" i="0">
+                <a:solidFill>
+                  <a:srgbClr val="068734"/>
+                </a:solidFill>
+                <a:latin typeface="Tahoma"/>
+              </a:rPr>
+              <a:t>การประสานงาน ผลิต ↔ สโตร์</a:t>
+            </a:r>
+          </a:p>
+        </p:txBody>
+      </p:sp>
+      <p:sp>
+        <p:nvSpPr>
+          <p:cNvPr id="5" name="TextBox 4"/>
+          <p:cNvSpPr txBox="1"/>
+          <p:nvPr/>
+        </p:nvSpPr>
+        <p:spPr>
+          <a:xfrm>
+            <a:off x="914400" y="3566160"/>
+            <a:ext cx="10332720" cy="640080"/>
+          </a:xfrm>
+          <a:prstGeom prst="rect">
+            <a:avLst/>
+          </a:prstGeom>
+          <a:noFill/>
+        </p:spPr>
+        <p:txBody>
+          <a:bodyPr wrap="square" anchor="t" lIns="27432" rIns="27432" tIns="9144" bIns="9144">
+            <a:spAutoFit/>
+          </a:bodyPr>
+          <a:lstStyle/>
+          <a:p>
+            <a:pPr algn="l">
+              <a:spcBef>
+                <a:spcPts val="0"/>
+              </a:spcBef>
+              <a:spcAft>
+                <a:spcPts val="200"/>
+              </a:spcAft>
+            </a:pPr>
+            <a:r>
+              <a:rPr sz="2400" b="1" i="0">
+                <a:solidFill>
+                  <a:srgbClr val="D95323"/>
+                </a:solidFill>
+                <a:latin typeface="Tahoma"/>
+              </a:rPr>
+              <a:t>ลูปเรียกงานจากสโตร์ — สถานะจริงและการมอบหมายงาน</a:t>
+            </a:r>
+          </a:p>
+        </p:txBody>
+      </p:sp>
+      <p:sp>
+        <p:nvSpPr>
+          <p:cNvPr id="6" name="TextBox 5"/>
+          <p:cNvSpPr txBox="1"/>
+          <p:nvPr/>
+        </p:nvSpPr>
+        <p:spPr>
+          <a:xfrm>
+            <a:off x="914400" y="4526280"/>
+            <a:ext cx="10332720" cy="457200"/>
+          </a:xfrm>
+          <a:prstGeom prst="rect">
+            <a:avLst/>
+          </a:prstGeom>
+          <a:noFill/>
+        </p:spPr>
+        <p:txBody>
+          <a:bodyPr wrap="square" anchor="t" lIns="27432" rIns="27432" tIns="9144" bIns="9144">
+            <a:spAutoFit/>
+          </a:bodyPr>
+          <a:lstStyle/>
+          <a:p>
+            <a:pPr algn="l">
+              <a:spcBef>
+                <a:spcPts val="0"/>
+              </a:spcBef>
+              <a:spcAft>
+                <a:spcPts val="200"/>
+              </a:spcAft>
+            </a:pPr>
+            <a:r>
+              <a:rPr sz="1600" b="0" i="0">
+                <a:solidFill>
+                  <a:srgbClr val="068734"/>
+                </a:solidFill>
+                <a:latin typeface="Tahoma"/>
+              </a:rPr>
+              <a:t>ประชุมมอบหมายงาน · 25 กันยายน 2026</a:t>
+            </a:r>
+          </a:p>
+        </p:txBody>
+      </p:sp>
+      <p:sp>
+        <p:nvSpPr>
+          <p:cNvPr id="7" name="TextBox 6"/>
+          <p:cNvSpPr txBox="1"/>
+          <p:nvPr/>
+        </p:nvSpPr>
+        <p:spPr>
+          <a:xfrm>
+            <a:off x="914400" y="4892040"/>
+            <a:ext cx="10332720" cy="457200"/>
+          </a:xfrm>
+          <a:prstGeom prst="rect">
+            <a:avLst/>
+          </a:prstGeom>
+          <a:noFill/>
+        </p:spPr>
+        <p:txBody>
+          <a:bodyPr wrap="square" anchor="t" lIns="27432" rIns="27432" tIns="9144" bIns="9144">
+            <a:spAutoFit/>
+          </a:bodyPr>
+          <a:lstStyle/>
+          <a:p>
+            <a:pPr algn="l">
+              <a:spcBef>
+                <a:spcPts val="0"/>
+              </a:spcBef>
+              <a:spcAft>
+                <a:spcPts val="200"/>
+              </a:spcAft>
+            </a:pPr>
+            <a:r>
+              <a:rPr sz="1400" b="0" i="0">
+                <a:solidFill>
+                  <a:srgbClr val="555555"/>
+                </a:solidFill>
+                <a:latin typeface="Tahoma"/>
+              </a:rPr>
+              <a:t>Thai Summit Autoparts Industry — ระบบ ESM</a:t>
+            </a:r>
+          </a:p>
+        </p:txBody>
+      </p:sp>
+      <p:sp>
+        <p:nvSpPr>
+          <p:cNvPr id="8" name="TextBox 7"/>
+          <p:cNvSpPr txBox="1"/>
+          <p:nvPr/>
+        </p:nvSpPr>
+        <p:spPr>
+          <a:xfrm>
+            <a:off x="914400" y="5532120"/>
+            <a:ext cx="10332720" cy="548640"/>
+          </a:xfrm>
+          <a:prstGeom prst="rect">
+            <a:avLst/>
+          </a:prstGeom>
+          <a:noFill/>
+        </p:spPr>
+        <p:txBody>
+          <a:bodyPr wrap="square" anchor="t" lIns="27432" rIns="27432" tIns="9144" bIns="9144">
+            <a:spAutoFit/>
+          </a:bodyPr>
+          <a:lstStyle/>
+          <a:p>
+            <a:pPr algn="l">
+              <a:spcBef>
+                <a:spcPts val="0"/>
+              </a:spcBef>
+              <a:spcAft>
+                <a:spcPts val="200"/>
+              </a:spcAft>
+            </a:pPr>
+            <a:r>
+              <a:rPr sz="1500" b="1" i="1">
+                <a:solidFill>
+                  <a:srgbClr val="D95323"/>
+                </a:solidFill>
+                <a:latin typeface="Tahoma"/>
+              </a:rPr>
+              <a:t>ตัวเลขทุกตัวในเอกสารนี้ อ่านจากฐานข้อมูลจริง ณ 24/09/2026</a:t>
+            </a:r>
+          </a:p>
+        </p:txBody>
+      </p:sp>
       <p:pic>
         <p:nvPicPr>
-          <p:cNvPr id="2" name="Picture 1" descr="bg_title.png"/>
+          <p:cNvPr id="9" name="Picture 8" descr="logo_r01.png"/>
           <p:cNvPicPr>
             <a:picLocks noChangeAspect="1"/>
           </p:cNvPicPr>
           <p:nvPr/>
         </p:nvPicPr>
         <p:blipFill>
-          <a:blip r:embed="rId2"/>
+          <a:blip r:embed="rId4"/>
           <a:stretch>
             <a:fillRect/>
           </a:stretch>
         </p:blipFill>
         <p:spPr>
           <a:xfrm>
-            <a:off x="0" y="0"/>
-            <a:ext cx="12191695" cy="6858000"/>
+            <a:off x="5413248" y="256032"/>
+            <a:ext cx="1143000" cy="1143000"/>
           </a:xfrm>
           <a:prstGeom prst="rect">
             <a:avLst/>
           </a:prstGeom>
         </p:spPr>
       </p:pic>
-      <p:pic>
-        <p:nvPicPr>
-          <p:cNvPr id="3" name="Picture 2" descr="logo_big.png"/>
-          <p:cNvPicPr>
-            <a:picLocks noChangeAspect="1"/>
-          </p:cNvPicPr>
-          <p:nvPr/>
-        </p:nvPicPr>
-        <p:blipFill>
-          <a:blip r:embed="rId3"/>
-          <a:stretch>
-            <a:fillRect/>
-          </a:stretch>
-        </p:blipFill>
-        <p:spPr>
-          <a:xfrm>
-            <a:off x="5486400" y="502920"/>
-            <a:ext cx="1481328" cy="1554480"/>
-          </a:xfrm>
-          <a:prstGeom prst="rect">
-            <a:avLst/>
-          </a:prstGeom>
-        </p:spPr>
-      </p:pic>
-      <p:sp>
-        <p:nvSpPr>
-          <p:cNvPr id="4" name="TextBox 3"/>
-          <p:cNvSpPr txBox="1"/>
-          <p:nvPr/>
-        </p:nvSpPr>
-        <p:spPr>
-          <a:xfrm>
-            <a:off x="914400" y="2514600"/>
-            <a:ext cx="10332720" cy="1005840"/>
-          </a:xfrm>
-          <a:prstGeom prst="rect">
-            <a:avLst/>
-          </a:prstGeom>
-          <a:noFill/>
-        </p:spPr>
-        <p:txBody>
-          <a:bodyPr wrap="square" anchor="t" lIns="27432" rIns="27432" tIns="9144" bIns="9144">
-            <a:spAutoFit/>
-          </a:bodyPr>
-          <a:lstStyle/>
-          <a:p>
-            <a:pPr algn="l">
-              <a:spcBef>
-                <a:spcPts val="0"/>
-              </a:spcBef>
-              <a:spcAft>
-                <a:spcPts val="200"/>
-              </a:spcAft>
-            </a:pPr>
-            <a:r>
-              <a:rPr sz="4400" b="1" i="0">
-                <a:solidFill>
-                  <a:srgbClr val="FFFFFF"/>
-                </a:solidFill>
-                <a:latin typeface="Tahoma"/>
-              </a:rPr>
-              <a:t>การประสานงาน ผลิต ↔ สโตร์</a:t>
-            </a:r>
-          </a:p>
-        </p:txBody>
-      </p:sp>
-      <p:sp>
-        <p:nvSpPr>
-          <p:cNvPr id="5" name="TextBox 4"/>
-          <p:cNvSpPr txBox="1"/>
-          <p:nvPr/>
-        </p:nvSpPr>
-        <p:spPr>
-          <a:xfrm>
-            <a:off x="914400" y="3566160"/>
-            <a:ext cx="10332720" cy="640080"/>
-          </a:xfrm>
-          <a:prstGeom prst="rect">
-            <a:avLst/>
-          </a:prstGeom>
-          <a:noFill/>
-        </p:spPr>
-        <p:txBody>
-          <a:bodyPr wrap="square" anchor="t" lIns="27432" rIns="27432" tIns="9144" bIns="9144">
-            <a:spAutoFit/>
-          </a:bodyPr>
-          <a:lstStyle/>
-          <a:p>
-            <a:pPr algn="l">
-              <a:spcBef>
-                <a:spcPts val="0"/>
-              </a:spcBef>
-              <a:spcAft>
-                <a:spcPts val="200"/>
-              </a:spcAft>
-            </a:pPr>
-            <a:r>
-              <a:rPr sz="2400" b="1" i="0">
-                <a:solidFill>
-                  <a:srgbClr val="EBD9B0"/>
-                </a:solidFill>
-                <a:latin typeface="Tahoma"/>
-              </a:rPr>
-              <a:t>ลูปเรียกงานจากสโตร์ — สถานะจริงและการมอบหมายงาน</a:t>
-            </a:r>
-          </a:p>
-        </p:txBody>
-      </p:sp>
-      <p:sp>
-        <p:nvSpPr>
-          <p:cNvPr id="6" name="TextBox 5"/>
-          <p:cNvSpPr txBox="1"/>
-          <p:nvPr/>
-        </p:nvSpPr>
-        <p:spPr>
-          <a:xfrm>
-            <a:off x="914400" y="4526280"/>
-            <a:ext cx="10332720" cy="457200"/>
-          </a:xfrm>
-          <a:prstGeom prst="rect">
-            <a:avLst/>
-          </a:prstGeom>
-          <a:noFill/>
-        </p:spPr>
-        <p:txBody>
-          <a:bodyPr wrap="square" anchor="t" lIns="27432" rIns="27432" tIns="9144" bIns="9144">
-            <a:spAutoFit/>
-          </a:bodyPr>
-          <a:lstStyle/>
-          <a:p>
-            <a:pPr algn="l">
-              <a:spcBef>
-                <a:spcPts val="0"/>
-              </a:spcBef>
-              <a:spcAft>
-                <a:spcPts val="200"/>
-              </a:spcAft>
-            </a:pPr>
-            <a:r>
-              <a:rPr sz="1600" b="0" i="0">
-                <a:solidFill>
-                  <a:srgbClr val="FFFFFF"/>
-                </a:solidFill>
-                <a:latin typeface="Tahoma"/>
-              </a:rPr>
-              <a:t>ประชุมมอบหมายงาน · 25 กันยายน 2026</a:t>
-            </a:r>
-          </a:p>
-        </p:txBody>
-      </p:sp>
-      <p:sp>
-        <p:nvSpPr>
-          <p:cNvPr id="7" name="TextBox 6"/>
-          <p:cNvSpPr txBox="1"/>
-          <p:nvPr/>
-        </p:nvSpPr>
-        <p:spPr>
-          <a:xfrm>
-            <a:off x="914400" y="4892040"/>
-            <a:ext cx="10332720" cy="457200"/>
-          </a:xfrm>
-          <a:prstGeom prst="rect">
-            <a:avLst/>
-          </a:prstGeom>
-          <a:noFill/>
-        </p:spPr>
-        <p:txBody>
-          <a:bodyPr wrap="square" anchor="t" lIns="27432" rIns="27432" tIns="9144" bIns="9144">
-            <a:spAutoFit/>
-          </a:bodyPr>
-          <a:lstStyle/>
-          <a:p>
-            <a:pPr algn="l">
-              <a:spcBef>
-                <a:spcPts val="0"/>
-              </a:spcBef>
-              <a:spcAft>
-                <a:spcPts val="200"/>
-              </a:spcAft>
-            </a:pPr>
-            <a:r>
-              <a:rPr sz="1400" b="0" i="0">
-                <a:solidFill>
-                  <a:srgbClr val="CFE0C8"/>
-                </a:solidFill>
-                <a:latin typeface="Tahoma"/>
-              </a:rPr>
-              <a:t>Thai Summit Autoparts Industry — ระบบ ESM</a:t>
-            </a:r>
-          </a:p>
-        </p:txBody>
-      </p:sp>
-      <p:sp>
-        <p:nvSpPr>
-          <p:cNvPr id="8" name="TextBox 7"/>
-          <p:cNvSpPr txBox="1"/>
-          <p:nvPr/>
-        </p:nvSpPr>
-        <p:spPr>
-          <a:xfrm>
-            <a:off x="914400" y="5532120"/>
-            <a:ext cx="10332720" cy="548640"/>
-          </a:xfrm>
-          <a:prstGeom prst="rect">
-            <a:avLst/>
-          </a:prstGeom>
-          <a:noFill/>
-        </p:spPr>
-        <p:txBody>
-          <a:bodyPr wrap="square" anchor="t" lIns="27432" rIns="27432" tIns="9144" bIns="9144">
-            <a:spAutoFit/>
-          </a:bodyPr>
-          <a:lstStyle/>
-          <a:p>
-            <a:pPr algn="l">
-              <a:spcBef>
-                <a:spcPts val="0"/>
-              </a:spcBef>
-              <a:spcAft>
-                <a:spcPts val="200"/>
-              </a:spcAft>
-            </a:pPr>
-            <a:r>
-              <a:rPr sz="1500" b="1" i="1">
-                <a:solidFill>
-                  <a:srgbClr val="EBD9B0"/>
-                </a:solidFill>
-                <a:latin typeface="Tahoma"/>
-              </a:rPr>
-              <a:t>ตัวเลขทุกตัวในเอกสารนี้ อ่านจากฐานข้อมูลจริง ณ 24/09/2026</a:t>
-            </a:r>
-          </a:p>
-        </p:txBody>
-      </p:sp>
     </p:spTree>
   </p:cSld>
   <p:clrMapOvr>
@@ -3371,30 +3347,6 @@
         <p:nvPr/>
       </p:nvGrpSpPr>
       <p:grpSpPr/>
-      <p:pic>
-        <p:nvPicPr>
-          <p:cNvPr id="2" name="Picture 1" descr="logo_footer.png"/>
-          <p:cNvPicPr>
-            <a:picLocks noChangeAspect="1"/>
-          </p:cNvPicPr>
-          <p:nvPr/>
-        </p:nvPicPr>
-        <p:blipFill>
-          <a:blip r:embed="rId2"/>
-          <a:stretch>
-            <a:fillRect/>
-          </a:stretch>
-        </p:blipFill>
-        <p:spPr>
-          <a:xfrm>
-            <a:off x="384048" y="6327648"/>
-            <a:ext cx="365760" cy="384048"/>
-          </a:xfrm>
-          <a:prstGeom prst="rect">
-            <a:avLst/>
-          </a:prstGeom>
-        </p:spPr>
-      </p:pic>
       <p:sp>
         <p:nvSpPr>
           <p:cNvPr id="3" name="TextBox 2"/>
@@ -3403,32 +3355,32 @@
         </p:nvSpPr>
         <p:spPr>
           <a:xfrm>
-            <a:off x="786384" y="6327648"/>
-            <a:ext cx="4114800" cy="411480"/>
-          </a:xfrm>
-          <a:prstGeom prst="rect">
-            <a:avLst/>
-          </a:prstGeom>
-          <a:noFill/>
-        </p:spPr>
-        <p:txBody>
-          <a:bodyPr wrap="square" anchor="ctr" lIns="27432" rIns="27432" tIns="9144" bIns="9144">
-            <a:spAutoFit/>
-          </a:bodyPr>
-          <a:lstStyle/>
-          <a:p>
-            <a:pPr algn="l">
-              <a:spcBef>
-                <a:spcPts val="0"/>
-              </a:spcBef>
-              <a:spcAft>
-                <a:spcPts val="200"/>
-              </a:spcAft>
-            </a:pPr>
-            <a:r>
-              <a:rPr sz="1300" b="1" i="0">
-                <a:solidFill>
-                  <a:srgbClr val="0D3D14"/>
+            <a:off x="566928" y="6353251"/>
+            <a:ext cx="3246120" cy="400507"/>
+          </a:xfrm>
+          <a:prstGeom prst="rect">
+            <a:avLst/>
+          </a:prstGeom>
+          <a:noFill/>
+        </p:spPr>
+        <p:txBody>
+          <a:bodyPr wrap="square" anchor="ctr" lIns="27432" rIns="27432" tIns="9144" bIns="9144">
+            <a:spAutoFit/>
+          </a:bodyPr>
+          <a:lstStyle/>
+          <a:p>
+            <a:pPr algn="l">
+              <a:spcBef>
+                <a:spcPts val="0"/>
+              </a:spcBef>
+              <a:spcAft>
+                <a:spcPts val="200"/>
+              </a:spcAft>
+            </a:pPr>
+            <a:r>
+              <a:rPr sz="2000" b="1" i="0">
+                <a:solidFill>
+                  <a:srgbClr val="068734"/>
                 </a:solidFill>
                 <a:latin typeface="Tahoma"/>
               </a:rPr>
@@ -3445,8 +3397,8 @@
         </p:nvSpPr>
         <p:spPr>
           <a:xfrm>
-            <a:off x="11430000" y="6355080"/>
-            <a:ext cx="594360" cy="365760"/>
+            <a:off x="9400032" y="6510528"/>
+            <a:ext cx="2514600" cy="292608"/>
           </a:xfrm>
           <a:prstGeom prst="rect">
             <a:avLst/>
@@ -3470,7 +3422,7 @@
             <a:r>
               <a:rPr sz="1200" b="0" i="0">
                 <a:solidFill>
-                  <a:srgbClr val="555555"/>
+                  <a:srgbClr val="068734"/>
                 </a:solidFill>
                 <a:latin typeface="Tahoma"/>
               </a:rPr>
@@ -3512,7 +3464,7 @@
             <a:r>
               <a:rPr sz="3400" b="1" i="0">
                 <a:solidFill>
-                  <a:srgbClr val="0D3D14"/>
+                  <a:srgbClr val="068734"/>
                 </a:solidFill>
                 <a:latin typeface="Tahoma"/>
               </a:rPr>
@@ -3554,7 +3506,7 @@
             <a:r>
               <a:rPr sz="1900" b="1" i="0">
                 <a:solidFill>
-                  <a:srgbClr val="2C5F2D"/>
+                  <a:srgbClr val="068734"/>
                 </a:solidFill>
                 <a:latin typeface="Tahoma"/>
               </a:rPr>
@@ -3582,7 +3534,7 @@
           </a:solidFill>
           <a:ln w="9525">
             <a:solidFill>
-              <a:srgbClr val="D8E4D0"/>
+              <a:srgbClr val="D9D9D9"/>
             </a:solidFill>
           </a:ln>
           <a:effectLst/>
@@ -3735,7 +3687,7 @@
             <a:r>
               <a:rPr sz="1300" b="1" i="0">
                 <a:solidFill>
-                  <a:srgbClr val="0D3D14"/>
+                  <a:srgbClr val="068734"/>
                 </a:solidFill>
                 <a:latin typeface="Tahoma"/>
               </a:rPr>
@@ -3838,7 +3790,7 @@
             <a:r>
               <a:rPr sz="2000" b="1" i="0">
                 <a:solidFill>
-                  <a:srgbClr val="C0561E"/>
+                  <a:srgbClr val="D95323"/>
                 </a:solidFill>
                 <a:latin typeface="Tahoma"/>
               </a:rPr>
@@ -3866,7 +3818,7 @@
           </a:solidFill>
           <a:ln w="9525">
             <a:solidFill>
-              <a:srgbClr val="D8E4D0"/>
+              <a:srgbClr val="D9D9D9"/>
             </a:solidFill>
           </a:ln>
           <a:effectLst/>
@@ -3915,7 +3867,7 @@
             <a:avLst/>
           </a:prstGeom>
           <a:solidFill>
-            <a:srgbClr val="2C5F2D"/>
+            <a:srgbClr val="068734"/>
           </a:solidFill>
           <a:ln>
             <a:noFill/>
@@ -4019,7 +3971,7 @@
             <a:r>
               <a:rPr sz="1300" b="1" i="0">
                 <a:solidFill>
-                  <a:srgbClr val="0D3D14"/>
+                  <a:srgbClr val="068734"/>
                 </a:solidFill>
                 <a:latin typeface="Tahoma"/>
               </a:rPr>
@@ -4122,7 +4074,7 @@
             <a:r>
               <a:rPr sz="2000" b="1" i="0">
                 <a:solidFill>
-                  <a:srgbClr val="C0561E"/>
+                  <a:srgbClr val="D95323"/>
                 </a:solidFill>
                 <a:latin typeface="Tahoma"/>
               </a:rPr>
@@ -4150,7 +4102,7 @@
           </a:solidFill>
           <a:ln w="9525">
             <a:solidFill>
-              <a:srgbClr val="D8E4D0"/>
+              <a:srgbClr val="D9D9D9"/>
             </a:solidFill>
           </a:ln>
           <a:effectLst/>
@@ -4199,7 +4151,7 @@
             <a:avLst/>
           </a:prstGeom>
           <a:solidFill>
-            <a:srgbClr val="2C5F2D"/>
+            <a:srgbClr val="068734"/>
           </a:solidFill>
           <a:ln>
             <a:noFill/>
@@ -4303,7 +4255,7 @@
             <a:r>
               <a:rPr sz="1300" b="1" i="0">
                 <a:solidFill>
-                  <a:srgbClr val="0D3D14"/>
+                  <a:srgbClr val="068734"/>
                 </a:solidFill>
                 <a:latin typeface="Tahoma"/>
               </a:rPr>
@@ -4406,7 +4358,7 @@
             <a:r>
               <a:rPr sz="2000" b="1" i="0">
                 <a:solidFill>
-                  <a:srgbClr val="C0561E"/>
+                  <a:srgbClr val="D95323"/>
                 </a:solidFill>
                 <a:latin typeface="Tahoma"/>
               </a:rPr>
@@ -4434,7 +4386,7 @@
           </a:solidFill>
           <a:ln w="9525">
             <a:solidFill>
-              <a:srgbClr val="D8E4D0"/>
+              <a:srgbClr val="D9D9D9"/>
             </a:solidFill>
           </a:ln>
           <a:effectLst/>
@@ -4483,7 +4435,7 @@
             <a:avLst/>
           </a:prstGeom>
           <a:solidFill>
-            <a:srgbClr val="2C5F2D"/>
+            <a:srgbClr val="068734"/>
           </a:solidFill>
           <a:ln>
             <a:noFill/>
@@ -4587,7 +4539,7 @@
             <a:r>
               <a:rPr sz="1300" b="1" i="0">
                 <a:solidFill>
-                  <a:srgbClr val="0D3D14"/>
+                  <a:srgbClr val="068734"/>
                 </a:solidFill>
                 <a:latin typeface="Tahoma"/>
               </a:rPr>
@@ -4690,7 +4642,7 @@
             <a:r>
               <a:rPr sz="2000" b="1" i="0">
                 <a:solidFill>
-                  <a:srgbClr val="C0561E"/>
+                  <a:srgbClr val="D95323"/>
                 </a:solidFill>
                 <a:latin typeface="Tahoma"/>
               </a:rPr>
@@ -4718,7 +4670,7 @@
           </a:solidFill>
           <a:ln w="9525">
             <a:solidFill>
-              <a:srgbClr val="D8E4D0"/>
+              <a:srgbClr val="D9D9D9"/>
             </a:solidFill>
           </a:ln>
           <a:effectLst/>
@@ -4767,7 +4719,7 @@
             <a:avLst/>
           </a:prstGeom>
           <a:solidFill>
-            <a:srgbClr val="C0561E"/>
+            <a:srgbClr val="D95323"/>
           </a:solidFill>
           <a:ln>
             <a:noFill/>
@@ -4871,7 +4823,7 @@
             <a:r>
               <a:rPr sz="1300" b="1" i="0">
                 <a:solidFill>
-                  <a:srgbClr val="0D3D14"/>
+                  <a:srgbClr val="068734"/>
                 </a:solidFill>
                 <a:latin typeface="Tahoma"/>
               </a:rPr>
@@ -5060,7 +5012,7 @@
             <a:r>
               <a:rPr sz="1500" b="0" i="0">
                 <a:solidFill>
-                  <a:srgbClr val="2C5F2D"/>
+                  <a:srgbClr val="068734"/>
                 </a:solidFill>
                 <a:latin typeface="Tahoma"/>
               </a:rPr>
@@ -5069,7 +5021,7 @@
             <a:r>
               <a:rPr sz="1500" b="1" i="0">
                 <a:solidFill>
-                  <a:srgbClr val="0D3D14"/>
+                  <a:srgbClr val="068734"/>
                 </a:solidFill>
                 <a:latin typeface="Tahoma"/>
               </a:rPr>
@@ -5078,7 +5030,7 @@
             <a:r>
               <a:rPr sz="1500" b="0" i="0">
                 <a:solidFill>
-                  <a:srgbClr val="2C5F2D"/>
+                  <a:srgbClr val="068734"/>
                 </a:solidFill>
                 <a:latin typeface="Tahoma"/>
               </a:rPr>
@@ -5087,7 +5039,7 @@
             <a:r>
               <a:rPr sz="1500" b="1" i="0">
                 <a:solidFill>
-                  <a:srgbClr val="0D3D14"/>
+                  <a:srgbClr val="068734"/>
                 </a:solidFill>
                 <a:latin typeface="Tahoma"/>
               </a:rPr>
@@ -5096,7 +5048,7 @@
             <a:r>
               <a:rPr sz="1500" b="0" i="0">
                 <a:solidFill>
-                  <a:srgbClr val="2C5F2D"/>
+                  <a:srgbClr val="068734"/>
                 </a:solidFill>
                 <a:latin typeface="Tahoma"/>
               </a:rPr>
@@ -5105,7 +5057,7 @@
             <a:r>
               <a:rPr sz="1500" b="1" i="0">
                 <a:solidFill>
-                  <a:srgbClr val="C0561E"/>
+                  <a:srgbClr val="D95323"/>
                 </a:solidFill>
                 <a:latin typeface="Tahoma"/>
               </a:rPr>
@@ -5124,7 +5076,7 @@
             <a:r>
               <a:rPr sz="1400" b="1" i="0">
                 <a:solidFill>
-                  <a:srgbClr val="C0561E"/>
+                  <a:srgbClr val="D95323"/>
                 </a:solidFill>
                 <a:latin typeface="Tahoma"/>
               </a:rPr>
@@ -5133,6 +5085,30 @@
           </a:p>
         </p:txBody>
       </p:sp>
+      <p:pic>
+        <p:nvPicPr>
+          <p:cNvPr id="39" name="Picture 38" descr="logo_r01.png"/>
+          <p:cNvPicPr>
+            <a:picLocks noChangeAspect="1"/>
+          </p:cNvPicPr>
+          <p:nvPr/>
+        </p:nvPicPr>
+        <p:blipFill>
+          <a:blip r:embed="rId3"/>
+          <a:stretch>
+            <a:fillRect/>
+          </a:stretch>
+        </p:blipFill>
+        <p:spPr>
+          <a:xfrm>
+            <a:off x="249631" y="6448348"/>
+            <a:ext cx="237744" cy="237744"/>
+          </a:xfrm>
+          <a:prstGeom prst="rect">
+            <a:avLst/>
+          </a:prstGeom>
+        </p:spPr>
+      </p:pic>
     </p:spTree>
   </p:cSld>
   <p:clrMapOvr>
@@ -5151,30 +5127,6 @@
         <p:nvPr/>
       </p:nvGrpSpPr>
       <p:grpSpPr/>
-      <p:pic>
-        <p:nvPicPr>
-          <p:cNvPr id="2" name="Picture 1" descr="logo_footer.png"/>
-          <p:cNvPicPr>
-            <a:picLocks noChangeAspect="1"/>
-          </p:cNvPicPr>
-          <p:nvPr/>
-        </p:nvPicPr>
-        <p:blipFill>
-          <a:blip r:embed="rId2"/>
-          <a:stretch>
-            <a:fillRect/>
-          </a:stretch>
-        </p:blipFill>
-        <p:spPr>
-          <a:xfrm>
-            <a:off x="384048" y="6327648"/>
-            <a:ext cx="365760" cy="384048"/>
-          </a:xfrm>
-          <a:prstGeom prst="rect">
-            <a:avLst/>
-          </a:prstGeom>
-        </p:spPr>
-      </p:pic>
       <p:sp>
         <p:nvSpPr>
           <p:cNvPr id="3" name="TextBox 2"/>
@@ -5183,32 +5135,32 @@
         </p:nvSpPr>
         <p:spPr>
           <a:xfrm>
-            <a:off x="786384" y="6327648"/>
-            <a:ext cx="4114800" cy="411480"/>
-          </a:xfrm>
-          <a:prstGeom prst="rect">
-            <a:avLst/>
-          </a:prstGeom>
-          <a:noFill/>
-        </p:spPr>
-        <p:txBody>
-          <a:bodyPr wrap="square" anchor="ctr" lIns="27432" rIns="27432" tIns="9144" bIns="9144">
-            <a:spAutoFit/>
-          </a:bodyPr>
-          <a:lstStyle/>
-          <a:p>
-            <a:pPr algn="l">
-              <a:spcBef>
-                <a:spcPts val="0"/>
-              </a:spcBef>
-              <a:spcAft>
-                <a:spcPts val="200"/>
-              </a:spcAft>
-            </a:pPr>
-            <a:r>
-              <a:rPr sz="1300" b="1" i="0">
-                <a:solidFill>
-                  <a:srgbClr val="0D3D14"/>
+            <a:off x="566928" y="6353251"/>
+            <a:ext cx="3246120" cy="400507"/>
+          </a:xfrm>
+          <a:prstGeom prst="rect">
+            <a:avLst/>
+          </a:prstGeom>
+          <a:noFill/>
+        </p:spPr>
+        <p:txBody>
+          <a:bodyPr wrap="square" anchor="ctr" lIns="27432" rIns="27432" tIns="9144" bIns="9144">
+            <a:spAutoFit/>
+          </a:bodyPr>
+          <a:lstStyle/>
+          <a:p>
+            <a:pPr algn="l">
+              <a:spcBef>
+                <a:spcPts val="0"/>
+              </a:spcBef>
+              <a:spcAft>
+                <a:spcPts val="200"/>
+              </a:spcAft>
+            </a:pPr>
+            <a:r>
+              <a:rPr sz="2000" b="1" i="0">
+                <a:solidFill>
+                  <a:srgbClr val="068734"/>
                 </a:solidFill>
                 <a:latin typeface="Tahoma"/>
               </a:rPr>
@@ -5225,8 +5177,8 @@
         </p:nvSpPr>
         <p:spPr>
           <a:xfrm>
-            <a:off x="11430000" y="6355080"/>
-            <a:ext cx="594360" cy="365760"/>
+            <a:off x="9400032" y="6510528"/>
+            <a:ext cx="2514600" cy="292608"/>
           </a:xfrm>
           <a:prstGeom prst="rect">
             <a:avLst/>
@@ -5250,7 +5202,7 @@
             <a:r>
               <a:rPr sz="1200" b="0" i="0">
                 <a:solidFill>
-                  <a:srgbClr val="555555"/>
+                  <a:srgbClr val="068734"/>
                 </a:solidFill>
                 <a:latin typeface="Tahoma"/>
               </a:rPr>
@@ -5292,7 +5244,7 @@
             <a:r>
               <a:rPr sz="3400" b="1" i="0">
                 <a:solidFill>
-                  <a:srgbClr val="0D3D14"/>
+                  <a:srgbClr val="068734"/>
                 </a:solidFill>
                 <a:latin typeface="Tahoma"/>
               </a:rPr>
@@ -5334,7 +5286,7 @@
             <a:r>
               <a:rPr sz="1900" b="1" i="0">
                 <a:solidFill>
-                  <a:srgbClr val="2C5F2D"/>
+                  <a:srgbClr val="068734"/>
                 </a:solidFill>
                 <a:latin typeface="Tahoma"/>
               </a:rPr>
@@ -5612,7 +5564,7 @@
             <a:avLst/>
           </a:prstGeom>
           <a:solidFill>
-            <a:srgbClr val="ECF1E9"/>
+            <a:srgbClr val="F2F2F2"/>
           </a:solidFill>
           <a:ln>
             <a:noFill/>
@@ -5674,7 +5626,7 @@
             <a:r>
               <a:rPr sz="1250" b="1" i="0">
                 <a:solidFill>
-                  <a:srgbClr val="0D3D14"/>
+                  <a:srgbClr val="068734"/>
                 </a:solidFill>
                 <a:latin typeface="Tahoma"/>
               </a:rPr>
@@ -5716,7 +5668,7 @@
             <a:r>
               <a:rPr sz="1700" b="1" i="0">
                 <a:solidFill>
-                  <a:srgbClr val="C0561E"/>
+                  <a:srgbClr val="D95323"/>
                 </a:solidFill>
                 <a:latin typeface="Tahoma"/>
               </a:rPr>
@@ -5758,7 +5710,7 @@
             <a:r>
               <a:rPr sz="1500" b="0" i="0">
                 <a:solidFill>
-                  <a:srgbClr val="2C5F2D"/>
+                  <a:srgbClr val="068734"/>
                 </a:solidFill>
                 <a:latin typeface="Tahoma"/>
               </a:rPr>
@@ -5800,7 +5752,7 @@
             <a:r>
               <a:rPr sz="1300" b="1" i="0">
                 <a:solidFill>
-                  <a:srgbClr val="C0561E"/>
+                  <a:srgbClr val="D95323"/>
                 </a:solidFill>
                 <a:latin typeface="Tahoma"/>
               </a:rPr>
@@ -5842,7 +5794,7 @@
             <a:r>
               <a:rPr sz="1200" b="0" i="0">
                 <a:solidFill>
-                  <a:srgbClr val="2C5F2D"/>
+                  <a:srgbClr val="068734"/>
                 </a:solidFill>
                 <a:latin typeface="Tahoma"/>
               </a:rPr>
@@ -5928,7 +5880,7 @@
             <a:r>
               <a:rPr sz="1250" b="1" i="0">
                 <a:solidFill>
-                  <a:srgbClr val="0D3D14"/>
+                  <a:srgbClr val="068734"/>
                 </a:solidFill>
                 <a:latin typeface="Tahoma"/>
               </a:rPr>
@@ -5970,7 +5922,7 @@
             <a:r>
               <a:rPr sz="1700" b="1" i="0">
                 <a:solidFill>
-                  <a:srgbClr val="C0561E"/>
+                  <a:srgbClr val="D95323"/>
                 </a:solidFill>
                 <a:latin typeface="Tahoma"/>
               </a:rPr>
@@ -6012,7 +5964,7 @@
             <a:r>
               <a:rPr sz="1500" b="0" i="0">
                 <a:solidFill>
-                  <a:srgbClr val="2C5F2D"/>
+                  <a:srgbClr val="068734"/>
                 </a:solidFill>
                 <a:latin typeface="Tahoma"/>
               </a:rPr>
@@ -6054,7 +6006,7 @@
             <a:r>
               <a:rPr sz="1300" b="1" i="0">
                 <a:solidFill>
-                  <a:srgbClr val="C0561E"/>
+                  <a:srgbClr val="D95323"/>
                 </a:solidFill>
                 <a:latin typeface="Tahoma"/>
               </a:rPr>
@@ -6096,7 +6048,7 @@
             <a:r>
               <a:rPr sz="1200" b="0" i="0">
                 <a:solidFill>
-                  <a:srgbClr val="2C5F2D"/>
+                  <a:srgbClr val="068734"/>
                 </a:solidFill>
                 <a:latin typeface="Tahoma"/>
               </a:rPr>
@@ -6120,7 +6072,7 @@
             <a:avLst/>
           </a:prstGeom>
           <a:solidFill>
-            <a:srgbClr val="ECF1E9"/>
+            <a:srgbClr val="F2F2F2"/>
           </a:solidFill>
           <a:ln>
             <a:noFill/>
@@ -6182,7 +6134,7 @@
             <a:r>
               <a:rPr sz="1250" b="1" i="0">
                 <a:solidFill>
-                  <a:srgbClr val="0D3D14"/>
+                  <a:srgbClr val="068734"/>
                 </a:solidFill>
                 <a:latin typeface="Tahoma"/>
               </a:rPr>
@@ -6224,7 +6176,7 @@
             <a:r>
               <a:rPr sz="1700" b="1" i="0">
                 <a:solidFill>
-                  <a:srgbClr val="C0561E"/>
+                  <a:srgbClr val="D95323"/>
                 </a:solidFill>
                 <a:latin typeface="Tahoma"/>
               </a:rPr>
@@ -6266,7 +6218,7 @@
             <a:r>
               <a:rPr sz="1500" b="0" i="0">
                 <a:solidFill>
-                  <a:srgbClr val="2C5F2D"/>
+                  <a:srgbClr val="068734"/>
                 </a:solidFill>
                 <a:latin typeface="Tahoma"/>
               </a:rPr>
@@ -6308,7 +6260,7 @@
             <a:r>
               <a:rPr sz="1300" b="1" i="0">
                 <a:solidFill>
-                  <a:srgbClr val="C0561E"/>
+                  <a:srgbClr val="D95323"/>
                 </a:solidFill>
                 <a:latin typeface="Tahoma"/>
               </a:rPr>
@@ -6350,7 +6302,7 @@
             <a:r>
               <a:rPr sz="1200" b="0" i="0">
                 <a:solidFill>
-                  <a:srgbClr val="2C5F2D"/>
+                  <a:srgbClr val="068734"/>
                 </a:solidFill>
                 <a:latin typeface="Tahoma"/>
               </a:rPr>
@@ -6436,7 +6388,7 @@
             <a:r>
               <a:rPr sz="1250" b="1" i="0">
                 <a:solidFill>
-                  <a:srgbClr val="0D3D14"/>
+                  <a:srgbClr val="068734"/>
                 </a:solidFill>
                 <a:latin typeface="Tahoma"/>
               </a:rPr>
@@ -6520,7 +6472,7 @@
             <a:r>
               <a:rPr sz="1500" b="0" i="0">
                 <a:solidFill>
-                  <a:srgbClr val="2C5F2D"/>
+                  <a:srgbClr val="068734"/>
                 </a:solidFill>
                 <a:latin typeface="Tahoma"/>
               </a:rPr>
@@ -6604,7 +6556,7 @@
             <a:r>
               <a:rPr sz="1200" b="0" i="0">
                 <a:solidFill>
-                  <a:srgbClr val="2C5F2D"/>
+                  <a:srgbClr val="068734"/>
                 </a:solidFill>
                 <a:latin typeface="Tahoma"/>
               </a:rPr>
@@ -6732,7 +6684,7 @@
             <a:r>
               <a:rPr sz="1500" b="1" i="0">
                 <a:solidFill>
-                  <a:srgbClr val="0D3D14"/>
+                  <a:srgbClr val="068734"/>
                 </a:solidFill>
                 <a:latin typeface="Tahoma"/>
               </a:rPr>
@@ -6760,6 +6712,30 @@
           </a:p>
         </p:txBody>
       </p:sp>
+      <p:pic>
+        <p:nvPicPr>
+          <p:cNvPr id="40" name="Picture 39" descr="logo_r01.png"/>
+          <p:cNvPicPr>
+            <a:picLocks noChangeAspect="1"/>
+          </p:cNvPicPr>
+          <p:nvPr/>
+        </p:nvPicPr>
+        <p:blipFill>
+          <a:blip r:embed="rId3"/>
+          <a:stretch>
+            <a:fillRect/>
+          </a:stretch>
+        </p:blipFill>
+        <p:spPr>
+          <a:xfrm>
+            <a:off x="249631" y="6448348"/>
+            <a:ext cx="237744" cy="237744"/>
+          </a:xfrm>
+          <a:prstGeom prst="rect">
+            <a:avLst/>
+          </a:prstGeom>
+        </p:spPr>
+      </p:pic>
     </p:spTree>
   </p:cSld>
   <p:clrMapOvr>
@@ -6778,30 +6754,6 @@
         <p:nvPr/>
       </p:nvGrpSpPr>
       <p:grpSpPr/>
-      <p:pic>
-        <p:nvPicPr>
-          <p:cNvPr id="2" name="Picture 1" descr="logo_footer.png"/>
-          <p:cNvPicPr>
-            <a:picLocks noChangeAspect="1"/>
-          </p:cNvPicPr>
-          <p:nvPr/>
-        </p:nvPicPr>
-        <p:blipFill>
-          <a:blip r:embed="rId2"/>
-          <a:stretch>
-            <a:fillRect/>
-          </a:stretch>
-        </p:blipFill>
-        <p:spPr>
-          <a:xfrm>
-            <a:off x="384048" y="6327648"/>
-            <a:ext cx="365760" cy="384048"/>
-          </a:xfrm>
-          <a:prstGeom prst="rect">
-            <a:avLst/>
-          </a:prstGeom>
-        </p:spPr>
-      </p:pic>
       <p:sp>
         <p:nvSpPr>
           <p:cNvPr id="3" name="TextBox 2"/>
@@ -6810,32 +6762,32 @@
         </p:nvSpPr>
         <p:spPr>
           <a:xfrm>
-            <a:off x="786384" y="6327648"/>
-            <a:ext cx="4114800" cy="411480"/>
-          </a:xfrm>
-          <a:prstGeom prst="rect">
-            <a:avLst/>
-          </a:prstGeom>
-          <a:noFill/>
-        </p:spPr>
-        <p:txBody>
-          <a:bodyPr wrap="square" anchor="ctr" lIns="27432" rIns="27432" tIns="9144" bIns="9144">
-            <a:spAutoFit/>
-          </a:bodyPr>
-          <a:lstStyle/>
-          <a:p>
-            <a:pPr algn="l">
-              <a:spcBef>
-                <a:spcPts val="0"/>
-              </a:spcBef>
-              <a:spcAft>
-                <a:spcPts val="200"/>
-              </a:spcAft>
-            </a:pPr>
-            <a:r>
-              <a:rPr sz="1300" b="1" i="0">
-                <a:solidFill>
-                  <a:srgbClr val="0D3D14"/>
+            <a:off x="566928" y="6353251"/>
+            <a:ext cx="3246120" cy="400507"/>
+          </a:xfrm>
+          <a:prstGeom prst="rect">
+            <a:avLst/>
+          </a:prstGeom>
+          <a:noFill/>
+        </p:spPr>
+        <p:txBody>
+          <a:bodyPr wrap="square" anchor="ctr" lIns="27432" rIns="27432" tIns="9144" bIns="9144">
+            <a:spAutoFit/>
+          </a:bodyPr>
+          <a:lstStyle/>
+          <a:p>
+            <a:pPr algn="l">
+              <a:spcBef>
+                <a:spcPts val="0"/>
+              </a:spcBef>
+              <a:spcAft>
+                <a:spcPts val="200"/>
+              </a:spcAft>
+            </a:pPr>
+            <a:r>
+              <a:rPr sz="2000" b="1" i="0">
+                <a:solidFill>
+                  <a:srgbClr val="068734"/>
                 </a:solidFill>
                 <a:latin typeface="Tahoma"/>
               </a:rPr>
@@ -6852,8 +6804,8 @@
         </p:nvSpPr>
         <p:spPr>
           <a:xfrm>
-            <a:off x="11430000" y="6355080"/>
-            <a:ext cx="594360" cy="365760"/>
+            <a:off x="9400032" y="6510528"/>
+            <a:ext cx="2514600" cy="292608"/>
           </a:xfrm>
           <a:prstGeom prst="rect">
             <a:avLst/>
@@ -6877,7 +6829,7 @@
             <a:r>
               <a:rPr sz="1200" b="0" i="0">
                 <a:solidFill>
-                  <a:srgbClr val="555555"/>
+                  <a:srgbClr val="068734"/>
                 </a:solidFill>
                 <a:latin typeface="Tahoma"/>
               </a:rPr>
@@ -6919,7 +6871,7 @@
             <a:r>
               <a:rPr sz="3400" b="1" i="0">
                 <a:solidFill>
-                  <a:srgbClr val="0D3D14"/>
+                  <a:srgbClr val="068734"/>
                 </a:solidFill>
                 <a:latin typeface="Tahoma"/>
               </a:rPr>
@@ -6961,7 +6913,7 @@
             <a:r>
               <a:rPr sz="1900" b="1" i="0">
                 <a:solidFill>
-                  <a:srgbClr val="2C5F2D"/>
+                  <a:srgbClr val="068734"/>
                 </a:solidFill>
                 <a:latin typeface="Tahoma"/>
               </a:rPr>
@@ -6985,11 +6937,11 @@
             <a:avLst/>
           </a:prstGeom>
           <a:solidFill>
-            <a:srgbClr val="ECF1E9"/>
+            <a:srgbClr val="F2F2F2"/>
           </a:solidFill>
           <a:ln w="9525">
             <a:solidFill>
-              <a:srgbClr val="D8E4D0"/>
+              <a:srgbClr val="D9D9D9"/>
             </a:solidFill>
           </a:ln>
           <a:effectLst/>
@@ -7031,7 +6983,7 @@
             <a:avLst/>
           </a:prstGeom>
           <a:solidFill>
-            <a:srgbClr val="2C5F2D"/>
+            <a:srgbClr val="068734"/>
           </a:solidFill>
           <a:ln>
             <a:noFill/>
@@ -7093,7 +7045,7 @@
             <a:r>
               <a:rPr sz="1300" b="1" i="0">
                 <a:solidFill>
-                  <a:srgbClr val="0D3D14"/>
+                  <a:srgbClr val="068734"/>
                 </a:solidFill>
                 <a:latin typeface="Tahoma"/>
               </a:rPr>
@@ -7135,7 +7087,7 @@
             <a:r>
               <a:rPr sz="1300" b="1" i="0">
                 <a:solidFill>
-                  <a:srgbClr val="2C5F2D"/>
+                  <a:srgbClr val="068734"/>
                 </a:solidFill>
                 <a:latin typeface="Tahoma"/>
               </a:rPr>
@@ -7201,11 +7153,11 @@
             <a:avLst/>
           </a:prstGeom>
           <a:solidFill>
-            <a:srgbClr val="ECF1E9"/>
+            <a:srgbClr val="F2F2F2"/>
           </a:solidFill>
           <a:ln w="9525">
             <a:solidFill>
-              <a:srgbClr val="D8E4D0"/>
+              <a:srgbClr val="D9D9D9"/>
             </a:solidFill>
           </a:ln>
           <a:effectLst/>
@@ -7247,7 +7199,7 @@
             <a:avLst/>
           </a:prstGeom>
           <a:solidFill>
-            <a:srgbClr val="2C5F2D"/>
+            <a:srgbClr val="068734"/>
           </a:solidFill>
           <a:ln>
             <a:noFill/>
@@ -7309,7 +7261,7 @@
             <a:r>
               <a:rPr sz="1300" b="1" i="0">
                 <a:solidFill>
-                  <a:srgbClr val="0D3D14"/>
+                  <a:srgbClr val="068734"/>
                 </a:solidFill>
                 <a:latin typeface="Tahoma"/>
               </a:rPr>
@@ -7351,7 +7303,7 @@
             <a:r>
               <a:rPr sz="1300" b="1" i="0">
                 <a:solidFill>
-                  <a:srgbClr val="2C5F2D"/>
+                  <a:srgbClr val="068734"/>
                 </a:solidFill>
                 <a:latin typeface="Tahoma"/>
               </a:rPr>
@@ -7417,11 +7369,11 @@
             <a:avLst/>
           </a:prstGeom>
           <a:solidFill>
-            <a:srgbClr val="ECF1E9"/>
+            <a:srgbClr val="F2F2F2"/>
           </a:solidFill>
           <a:ln w="9525">
             <a:solidFill>
-              <a:srgbClr val="D8E4D0"/>
+              <a:srgbClr val="D9D9D9"/>
             </a:solidFill>
           </a:ln>
           <a:effectLst/>
@@ -7463,7 +7415,7 @@
             <a:avLst/>
           </a:prstGeom>
           <a:solidFill>
-            <a:srgbClr val="2C5F2D"/>
+            <a:srgbClr val="068734"/>
           </a:solidFill>
           <a:ln>
             <a:noFill/>
@@ -7525,7 +7477,7 @@
             <a:r>
               <a:rPr sz="1300" b="1" i="0">
                 <a:solidFill>
-                  <a:srgbClr val="0D3D14"/>
+                  <a:srgbClr val="068734"/>
                 </a:solidFill>
                 <a:latin typeface="Tahoma"/>
               </a:rPr>
@@ -7567,7 +7519,7 @@
             <a:r>
               <a:rPr sz="1300" b="1" i="0">
                 <a:solidFill>
-                  <a:srgbClr val="2C5F2D"/>
+                  <a:srgbClr val="068734"/>
                 </a:solidFill>
                 <a:latin typeface="Tahoma"/>
               </a:rPr>
@@ -7637,7 +7589,7 @@
           </a:solidFill>
           <a:ln w="9525">
             <a:solidFill>
-              <a:srgbClr val="D8E4D0"/>
+              <a:srgbClr val="D9D9D9"/>
             </a:solidFill>
           </a:ln>
           <a:effectLst/>
@@ -7679,7 +7631,7 @@
             <a:avLst/>
           </a:prstGeom>
           <a:solidFill>
-            <a:srgbClr val="C0561E"/>
+            <a:srgbClr val="D95323"/>
           </a:solidFill>
           <a:ln>
             <a:noFill/>
@@ -7741,7 +7693,7 @@
             <a:r>
               <a:rPr sz="1300" b="1" i="0">
                 <a:solidFill>
-                  <a:srgbClr val="0D3D14"/>
+                  <a:srgbClr val="068734"/>
                 </a:solidFill>
                 <a:latin typeface="Tahoma"/>
               </a:rPr>
@@ -7783,7 +7735,7 @@
             <a:r>
               <a:rPr sz="1300" b="1" i="0">
                 <a:solidFill>
-                  <a:srgbClr val="C0561E"/>
+                  <a:srgbClr val="D95323"/>
                 </a:solidFill>
                 <a:latin typeface="Tahoma"/>
               </a:rPr>
@@ -7853,7 +7805,7 @@
           </a:solidFill>
           <a:ln w="9525">
             <a:solidFill>
-              <a:srgbClr val="D8E4D0"/>
+              <a:srgbClr val="D9D9D9"/>
             </a:solidFill>
           </a:ln>
           <a:effectLst/>
@@ -7895,7 +7847,7 @@
             <a:avLst/>
           </a:prstGeom>
           <a:solidFill>
-            <a:srgbClr val="C0561E"/>
+            <a:srgbClr val="D95323"/>
           </a:solidFill>
           <a:ln>
             <a:noFill/>
@@ -7957,7 +7909,7 @@
             <a:r>
               <a:rPr sz="1300" b="1" i="0">
                 <a:solidFill>
-                  <a:srgbClr val="0D3D14"/>
+                  <a:srgbClr val="068734"/>
                 </a:solidFill>
                 <a:latin typeface="Tahoma"/>
               </a:rPr>
@@ -7999,7 +7951,7 @@
             <a:r>
               <a:rPr sz="1300" b="1" i="0">
                 <a:solidFill>
-                  <a:srgbClr val="C0561E"/>
+                  <a:srgbClr val="D95323"/>
                 </a:solidFill>
                 <a:latin typeface="Tahoma"/>
               </a:rPr>
@@ -8069,7 +8021,7 @@
           </a:solidFill>
           <a:ln w="9525">
             <a:solidFill>
-              <a:srgbClr val="D8E4D0"/>
+              <a:srgbClr val="D9D9D9"/>
             </a:solidFill>
           </a:ln>
           <a:effectLst/>
@@ -8111,7 +8063,7 @@
             <a:avLst/>
           </a:prstGeom>
           <a:solidFill>
-            <a:srgbClr val="C0561E"/>
+            <a:srgbClr val="D95323"/>
           </a:solidFill>
           <a:ln>
             <a:noFill/>
@@ -8173,7 +8125,7 @@
             <a:r>
               <a:rPr sz="1300" b="1" i="0">
                 <a:solidFill>
-                  <a:srgbClr val="0D3D14"/>
+                  <a:srgbClr val="068734"/>
                 </a:solidFill>
                 <a:latin typeface="Tahoma"/>
               </a:rPr>
@@ -8215,7 +8167,7 @@
             <a:r>
               <a:rPr sz="1300" b="1" i="0">
                 <a:solidFill>
-                  <a:srgbClr val="C0561E"/>
+                  <a:srgbClr val="D95323"/>
                 </a:solidFill>
                 <a:latin typeface="Tahoma"/>
               </a:rPr>
@@ -8285,7 +8237,7 @@
           </a:solidFill>
           <a:ln w="9525">
             <a:solidFill>
-              <a:srgbClr val="D8E4D0"/>
+              <a:srgbClr val="D9D9D9"/>
             </a:solidFill>
           </a:ln>
           <a:effectLst/>
@@ -8327,7 +8279,7 @@
             <a:avLst/>
           </a:prstGeom>
           <a:solidFill>
-            <a:srgbClr val="C0561E"/>
+            <a:srgbClr val="D95323"/>
           </a:solidFill>
           <a:ln>
             <a:noFill/>
@@ -8389,7 +8341,7 @@
             <a:r>
               <a:rPr sz="1300" b="1" i="0">
                 <a:solidFill>
-                  <a:srgbClr val="0D3D14"/>
+                  <a:srgbClr val="068734"/>
                 </a:solidFill>
                 <a:latin typeface="Tahoma"/>
               </a:rPr>
@@ -8431,7 +8383,7 @@
             <a:r>
               <a:rPr sz="1300" b="1" i="0">
                 <a:solidFill>
-                  <a:srgbClr val="C0561E"/>
+                  <a:srgbClr val="D95323"/>
                 </a:solidFill>
                 <a:latin typeface="Tahoma"/>
               </a:rPr>
@@ -8501,7 +8453,7 @@
           </a:solidFill>
           <a:ln w="9525">
             <a:solidFill>
-              <a:srgbClr val="D8E4D0"/>
+              <a:srgbClr val="D9D9D9"/>
             </a:solidFill>
           </a:ln>
           <a:effectLst/>
@@ -8605,7 +8557,7 @@
             <a:r>
               <a:rPr sz="1300" b="1" i="0">
                 <a:solidFill>
-                  <a:srgbClr val="0D3D14"/>
+                  <a:srgbClr val="068734"/>
                 </a:solidFill>
                 <a:latin typeface="Tahoma"/>
               </a:rPr>
@@ -8698,6 +8650,30 @@
           </a:p>
         </p:txBody>
       </p:sp>
+      <p:pic>
+        <p:nvPicPr>
+          <p:cNvPr id="47" name="Picture 46" descr="logo_r01.png"/>
+          <p:cNvPicPr>
+            <a:picLocks noChangeAspect="1"/>
+          </p:cNvPicPr>
+          <p:nvPr/>
+        </p:nvPicPr>
+        <p:blipFill>
+          <a:blip r:embed="rId3"/>
+          <a:stretch>
+            <a:fillRect/>
+          </a:stretch>
+        </p:blipFill>
+        <p:spPr>
+          <a:xfrm>
+            <a:off x="249631" y="6448348"/>
+            <a:ext cx="237744" cy="237744"/>
+          </a:xfrm>
+          <a:prstGeom prst="rect">
+            <a:avLst/>
+          </a:prstGeom>
+        </p:spPr>
+      </p:pic>
     </p:spTree>
   </p:cSld>
   <p:clrMapOvr>
@@ -8716,30 +8692,6 @@
         <p:nvPr/>
       </p:nvGrpSpPr>
       <p:grpSpPr/>
-      <p:pic>
-        <p:nvPicPr>
-          <p:cNvPr id="2" name="Picture 1" descr="logo_footer.png"/>
-          <p:cNvPicPr>
-            <a:picLocks noChangeAspect="1"/>
-          </p:cNvPicPr>
-          <p:nvPr/>
-        </p:nvPicPr>
-        <p:blipFill>
-          <a:blip r:embed="rId2"/>
-          <a:stretch>
-            <a:fillRect/>
-          </a:stretch>
-        </p:blipFill>
-        <p:spPr>
-          <a:xfrm>
-            <a:off x="384048" y="6327648"/>
-            <a:ext cx="365760" cy="384048"/>
-          </a:xfrm>
-          <a:prstGeom prst="rect">
-            <a:avLst/>
-          </a:prstGeom>
-        </p:spPr>
-      </p:pic>
       <p:sp>
         <p:nvSpPr>
           <p:cNvPr id="3" name="TextBox 2"/>
@@ -8748,32 +8700,32 @@
         </p:nvSpPr>
         <p:spPr>
           <a:xfrm>
-            <a:off x="786384" y="6327648"/>
-            <a:ext cx="4114800" cy="411480"/>
-          </a:xfrm>
-          <a:prstGeom prst="rect">
-            <a:avLst/>
-          </a:prstGeom>
-          <a:noFill/>
-        </p:spPr>
-        <p:txBody>
-          <a:bodyPr wrap="square" anchor="ctr" lIns="27432" rIns="27432" tIns="9144" bIns="9144">
-            <a:spAutoFit/>
-          </a:bodyPr>
-          <a:lstStyle/>
-          <a:p>
-            <a:pPr algn="l">
-              <a:spcBef>
-                <a:spcPts val="0"/>
-              </a:spcBef>
-              <a:spcAft>
-                <a:spcPts val="200"/>
-              </a:spcAft>
-            </a:pPr>
-            <a:r>
-              <a:rPr sz="1300" b="1" i="0">
-                <a:solidFill>
-                  <a:srgbClr val="0D3D14"/>
+            <a:off x="566928" y="6353251"/>
+            <a:ext cx="3246120" cy="400507"/>
+          </a:xfrm>
+          <a:prstGeom prst="rect">
+            <a:avLst/>
+          </a:prstGeom>
+          <a:noFill/>
+        </p:spPr>
+        <p:txBody>
+          <a:bodyPr wrap="square" anchor="ctr" lIns="27432" rIns="27432" tIns="9144" bIns="9144">
+            <a:spAutoFit/>
+          </a:bodyPr>
+          <a:lstStyle/>
+          <a:p>
+            <a:pPr algn="l">
+              <a:spcBef>
+                <a:spcPts val="0"/>
+              </a:spcBef>
+              <a:spcAft>
+                <a:spcPts val="200"/>
+              </a:spcAft>
+            </a:pPr>
+            <a:r>
+              <a:rPr sz="2000" b="1" i="0">
+                <a:solidFill>
+                  <a:srgbClr val="068734"/>
                 </a:solidFill>
                 <a:latin typeface="Tahoma"/>
               </a:rPr>
@@ -8790,8 +8742,8 @@
         </p:nvSpPr>
         <p:spPr>
           <a:xfrm>
-            <a:off x="11430000" y="6355080"/>
-            <a:ext cx="594360" cy="365760"/>
+            <a:off x="9400032" y="6510528"/>
+            <a:ext cx="2514600" cy="292608"/>
           </a:xfrm>
           <a:prstGeom prst="rect">
             <a:avLst/>
@@ -8815,7 +8767,7 @@
             <a:r>
               <a:rPr sz="1200" b="0" i="0">
                 <a:solidFill>
-                  <a:srgbClr val="555555"/>
+                  <a:srgbClr val="068734"/>
                 </a:solidFill>
                 <a:latin typeface="Tahoma"/>
               </a:rPr>
@@ -8857,7 +8809,7 @@
             <a:r>
               <a:rPr sz="3400" b="1" i="0">
                 <a:solidFill>
-                  <a:srgbClr val="0D3D14"/>
+                  <a:srgbClr val="068734"/>
                 </a:solidFill>
                 <a:latin typeface="Tahoma"/>
               </a:rPr>
@@ -8899,7 +8851,7 @@
             <a:r>
               <a:rPr sz="1900" b="1" i="0">
                 <a:solidFill>
-                  <a:srgbClr val="2C5F2D"/>
+                  <a:srgbClr val="068734"/>
                 </a:solidFill>
                 <a:latin typeface="Tahoma"/>
               </a:rPr>
@@ -8927,7 +8879,7 @@
           </a:solidFill>
           <a:ln w="9525">
             <a:solidFill>
-              <a:srgbClr val="D8E4D0"/>
+              <a:srgbClr val="D9D9D9"/>
             </a:solidFill>
           </a:ln>
           <a:effectLst/>
@@ -8994,7 +8946,7 @@
             <a:r>
               <a:rPr sz="3000" b="1" i="0">
                 <a:solidFill>
-                  <a:srgbClr val="C0561E"/>
+                  <a:srgbClr val="D95323"/>
                 </a:solidFill>
                 <a:latin typeface="Tahoma"/>
               </a:rPr>
@@ -9064,7 +9016,7 @@
           </a:solidFill>
           <a:ln w="9525">
             <a:solidFill>
-              <a:srgbClr val="D8E4D0"/>
+              <a:srgbClr val="D9D9D9"/>
             </a:solidFill>
           </a:ln>
           <a:effectLst/>
@@ -9131,7 +9083,7 @@
             <a:r>
               <a:rPr sz="3000" b="1" i="0">
                 <a:solidFill>
-                  <a:srgbClr val="C0561E"/>
+                  <a:srgbClr val="D95323"/>
                 </a:solidFill>
                 <a:latin typeface="Tahoma"/>
               </a:rPr>
@@ -9201,7 +9153,7 @@
           </a:solidFill>
           <a:ln w="9525">
             <a:solidFill>
-              <a:srgbClr val="D8E4D0"/>
+              <a:srgbClr val="D9D9D9"/>
             </a:solidFill>
           </a:ln>
           <a:effectLst/>
@@ -9268,7 +9220,7 @@
             <a:r>
               <a:rPr sz="3000" b="1" i="0">
                 <a:solidFill>
-                  <a:srgbClr val="C0561E"/>
+                  <a:srgbClr val="D95323"/>
                 </a:solidFill>
                 <a:latin typeface="Tahoma"/>
               </a:rPr>
@@ -9338,7 +9290,7 @@
           </a:solidFill>
           <a:ln w="9525">
             <a:solidFill>
-              <a:srgbClr val="D8E4D0"/>
+              <a:srgbClr val="D9D9D9"/>
             </a:solidFill>
           </a:ln>
           <a:effectLst/>
@@ -9405,7 +9357,7 @@
             <a:r>
               <a:rPr sz="3000" b="1" i="0">
                 <a:solidFill>
-                  <a:srgbClr val="C0561E"/>
+                  <a:srgbClr val="D95323"/>
                 </a:solidFill>
                 <a:latin typeface="Tahoma"/>
               </a:rPr>
@@ -9575,7 +9527,7 @@
             <a:r>
               <a:rPr sz="1500" b="1" i="0">
                 <a:solidFill>
-                  <a:srgbClr val="0D3D14"/>
+                  <a:srgbClr val="068734"/>
                 </a:solidFill>
                 <a:latin typeface="Tahoma"/>
               </a:rPr>
@@ -9594,7 +9546,7 @@
             <a:r>
               <a:rPr sz="1300" b="0" i="0">
                 <a:solidFill>
-                  <a:srgbClr val="2C5F2D"/>
+                  <a:srgbClr val="068734"/>
                 </a:solidFill>
                 <a:latin typeface="Tahoma"/>
               </a:rPr>
@@ -9613,7 +9565,7 @@
             <a:r>
               <a:rPr sz="1300" b="0" i="0">
                 <a:solidFill>
-                  <a:srgbClr val="2C5F2D"/>
+                  <a:srgbClr val="068734"/>
                 </a:solidFill>
                 <a:latin typeface="Tahoma"/>
               </a:rPr>
@@ -9632,7 +9584,7 @@
             <a:r>
               <a:rPr sz="1400" b="1" i="0">
                 <a:solidFill>
-                  <a:srgbClr val="C0561E"/>
+                  <a:srgbClr val="D95323"/>
                 </a:solidFill>
                 <a:latin typeface="Tahoma"/>
               </a:rPr>
@@ -9641,6 +9593,30 @@
           </a:p>
         </p:txBody>
       </p:sp>
+      <p:pic>
+        <p:nvPicPr>
+          <p:cNvPr id="22" name="Picture 21" descr="logo_r01.png"/>
+          <p:cNvPicPr>
+            <a:picLocks noChangeAspect="1"/>
+          </p:cNvPicPr>
+          <p:nvPr/>
+        </p:nvPicPr>
+        <p:blipFill>
+          <a:blip r:embed="rId3"/>
+          <a:stretch>
+            <a:fillRect/>
+          </a:stretch>
+        </p:blipFill>
+        <p:spPr>
+          <a:xfrm>
+            <a:off x="249631" y="6448348"/>
+            <a:ext cx="237744" cy="237744"/>
+          </a:xfrm>
+          <a:prstGeom prst="rect">
+            <a:avLst/>
+          </a:prstGeom>
+        </p:spPr>
+      </p:pic>
     </p:spTree>
   </p:cSld>
   <p:clrMapOvr>
@@ -9659,30 +9635,6 @@
         <p:nvPr/>
       </p:nvGrpSpPr>
       <p:grpSpPr/>
-      <p:pic>
-        <p:nvPicPr>
-          <p:cNvPr id="2" name="Picture 1" descr="logo_footer.png"/>
-          <p:cNvPicPr>
-            <a:picLocks noChangeAspect="1"/>
-          </p:cNvPicPr>
-          <p:nvPr/>
-        </p:nvPicPr>
-        <p:blipFill>
-          <a:blip r:embed="rId2"/>
-          <a:stretch>
-            <a:fillRect/>
-          </a:stretch>
-        </p:blipFill>
-        <p:spPr>
-          <a:xfrm>
-            <a:off x="384048" y="6327648"/>
-            <a:ext cx="365760" cy="384048"/>
-          </a:xfrm>
-          <a:prstGeom prst="rect">
-            <a:avLst/>
-          </a:prstGeom>
-        </p:spPr>
-      </p:pic>
       <p:sp>
         <p:nvSpPr>
           <p:cNvPr id="3" name="TextBox 2"/>
@@ -9691,32 +9643,32 @@
         </p:nvSpPr>
         <p:spPr>
           <a:xfrm>
-            <a:off x="786384" y="6327648"/>
-            <a:ext cx="4114800" cy="411480"/>
-          </a:xfrm>
-          <a:prstGeom prst="rect">
-            <a:avLst/>
-          </a:prstGeom>
-          <a:noFill/>
-        </p:spPr>
-        <p:txBody>
-          <a:bodyPr wrap="square" anchor="ctr" lIns="27432" rIns="27432" tIns="9144" bIns="9144">
-            <a:spAutoFit/>
-          </a:bodyPr>
-          <a:lstStyle/>
-          <a:p>
-            <a:pPr algn="l">
-              <a:spcBef>
-                <a:spcPts val="0"/>
-              </a:spcBef>
-              <a:spcAft>
-                <a:spcPts val="200"/>
-              </a:spcAft>
-            </a:pPr>
-            <a:r>
-              <a:rPr sz="1300" b="1" i="0">
-                <a:solidFill>
-                  <a:srgbClr val="0D3D14"/>
+            <a:off x="566928" y="6353251"/>
+            <a:ext cx="3246120" cy="400507"/>
+          </a:xfrm>
+          <a:prstGeom prst="rect">
+            <a:avLst/>
+          </a:prstGeom>
+          <a:noFill/>
+        </p:spPr>
+        <p:txBody>
+          <a:bodyPr wrap="square" anchor="ctr" lIns="27432" rIns="27432" tIns="9144" bIns="9144">
+            <a:spAutoFit/>
+          </a:bodyPr>
+          <a:lstStyle/>
+          <a:p>
+            <a:pPr algn="l">
+              <a:spcBef>
+                <a:spcPts val="0"/>
+              </a:spcBef>
+              <a:spcAft>
+                <a:spcPts val="200"/>
+              </a:spcAft>
+            </a:pPr>
+            <a:r>
+              <a:rPr sz="2000" b="1" i="0">
+                <a:solidFill>
+                  <a:srgbClr val="068734"/>
                 </a:solidFill>
                 <a:latin typeface="Tahoma"/>
               </a:rPr>
@@ -9733,8 +9685,8 @@
         </p:nvSpPr>
         <p:spPr>
           <a:xfrm>
-            <a:off x="11430000" y="6355080"/>
-            <a:ext cx="594360" cy="365760"/>
+            <a:off x="9400032" y="6510528"/>
+            <a:ext cx="2514600" cy="292608"/>
           </a:xfrm>
           <a:prstGeom prst="rect">
             <a:avLst/>
@@ -9758,7 +9710,7 @@
             <a:r>
               <a:rPr sz="1200" b="0" i="0">
                 <a:solidFill>
-                  <a:srgbClr val="555555"/>
+                  <a:srgbClr val="068734"/>
                 </a:solidFill>
                 <a:latin typeface="Tahoma"/>
               </a:rPr>
@@ -9800,7 +9752,7 @@
             <a:r>
               <a:rPr sz="3400" b="1" i="0">
                 <a:solidFill>
-                  <a:srgbClr val="0D3D14"/>
+                  <a:srgbClr val="068734"/>
                 </a:solidFill>
                 <a:latin typeface="Tahoma"/>
               </a:rPr>
@@ -9842,7 +9794,7 @@
             <a:r>
               <a:rPr sz="1900" b="1" i="0">
                 <a:solidFill>
-                  <a:srgbClr val="2C5F2D"/>
+                  <a:srgbClr val="068734"/>
                 </a:solidFill>
                 <a:latin typeface="Tahoma"/>
               </a:rPr>
@@ -10120,7 +10072,7 @@
             <a:avLst/>
           </a:prstGeom>
           <a:solidFill>
-            <a:srgbClr val="ECF1E9"/>
+            <a:srgbClr val="F2F2F2"/>
           </a:solidFill>
           <a:ln>
             <a:noFill/>
@@ -10164,7 +10116,7 @@
             <a:avLst/>
           </a:prstGeom>
           <a:solidFill>
-            <a:srgbClr val="C0561E"/>
+            <a:srgbClr val="D95323"/>
           </a:solidFill>
           <a:ln>
             <a:noFill/>
@@ -10268,7 +10220,7 @@
             <a:r>
               <a:rPr sz="1200" b="1" i="0">
                 <a:solidFill>
-                  <a:srgbClr val="0D3D14"/>
+                  <a:srgbClr val="068734"/>
                 </a:solidFill>
                 <a:latin typeface="Tahoma"/>
               </a:rPr>
@@ -10310,7 +10262,7 @@
             <a:r>
               <a:rPr sz="1200" b="0" i="0">
                 <a:solidFill>
-                  <a:srgbClr val="2C5F2D"/>
+                  <a:srgbClr val="068734"/>
                 </a:solidFill>
                 <a:latin typeface="Tahoma"/>
               </a:rPr>
@@ -10394,7 +10346,7 @@
             <a:r>
               <a:rPr sz="1100" b="1" i="0">
                 <a:solidFill>
-                  <a:srgbClr val="C0561E"/>
+                  <a:srgbClr val="D95323"/>
                 </a:solidFill>
                 <a:latin typeface="Tahoma"/>
               </a:rPr>
@@ -10462,7 +10414,7 @@
             <a:avLst/>
           </a:prstGeom>
           <a:solidFill>
-            <a:srgbClr val="C0561E"/>
+            <a:srgbClr val="D95323"/>
           </a:solidFill>
           <a:ln>
             <a:noFill/>
@@ -10566,7 +10518,7 @@
             <a:r>
               <a:rPr sz="1200" b="1" i="0">
                 <a:solidFill>
-                  <a:srgbClr val="0D3D14"/>
+                  <a:srgbClr val="068734"/>
                 </a:solidFill>
                 <a:latin typeface="Tahoma"/>
               </a:rPr>
@@ -10608,7 +10560,7 @@
             <a:r>
               <a:rPr sz="1200" b="0" i="0">
                 <a:solidFill>
-                  <a:srgbClr val="2C5F2D"/>
+                  <a:srgbClr val="068734"/>
                 </a:solidFill>
                 <a:latin typeface="Tahoma"/>
               </a:rPr>
@@ -10692,7 +10644,7 @@
             <a:r>
               <a:rPr sz="1100" b="1" i="0">
                 <a:solidFill>
-                  <a:srgbClr val="C0561E"/>
+                  <a:srgbClr val="D95323"/>
                 </a:solidFill>
                 <a:latin typeface="Tahoma"/>
               </a:rPr>
@@ -10716,7 +10668,7 @@
             <a:avLst/>
           </a:prstGeom>
           <a:solidFill>
-            <a:srgbClr val="ECF1E9"/>
+            <a:srgbClr val="F2F2F2"/>
           </a:solidFill>
           <a:ln>
             <a:noFill/>
@@ -10760,7 +10712,7 @@
             <a:avLst/>
           </a:prstGeom>
           <a:solidFill>
-            <a:srgbClr val="C0561E"/>
+            <a:srgbClr val="D95323"/>
           </a:solidFill>
           <a:ln>
             <a:noFill/>
@@ -10864,7 +10816,7 @@
             <a:r>
               <a:rPr sz="1200" b="1" i="0">
                 <a:solidFill>
-                  <a:srgbClr val="0D3D14"/>
+                  <a:srgbClr val="068734"/>
                 </a:solidFill>
                 <a:latin typeface="Tahoma"/>
               </a:rPr>
@@ -10906,7 +10858,7 @@
             <a:r>
               <a:rPr sz="1200" b="0" i="0">
                 <a:solidFill>
-                  <a:srgbClr val="2C5F2D"/>
+                  <a:srgbClr val="068734"/>
                 </a:solidFill>
                 <a:latin typeface="Tahoma"/>
               </a:rPr>
@@ -10990,7 +10942,7 @@
             <a:r>
               <a:rPr sz="1100" b="1" i="0">
                 <a:solidFill>
-                  <a:srgbClr val="C0561E"/>
+                  <a:srgbClr val="D95323"/>
                 </a:solidFill>
                 <a:latin typeface="Tahoma"/>
               </a:rPr>
@@ -11058,7 +11010,7 @@
             <a:avLst/>
           </a:prstGeom>
           <a:solidFill>
-            <a:srgbClr val="C0561E"/>
+            <a:srgbClr val="D95323"/>
           </a:solidFill>
           <a:ln>
             <a:noFill/>
@@ -11162,7 +11114,7 @@
             <a:r>
               <a:rPr sz="1200" b="1" i="0">
                 <a:solidFill>
-                  <a:srgbClr val="0D3D14"/>
+                  <a:srgbClr val="068734"/>
                 </a:solidFill>
                 <a:latin typeface="Tahoma"/>
               </a:rPr>
@@ -11204,7 +11156,7 @@
             <a:r>
               <a:rPr sz="1200" b="0" i="0">
                 <a:solidFill>
-                  <a:srgbClr val="2C5F2D"/>
+                  <a:srgbClr val="068734"/>
                 </a:solidFill>
                 <a:latin typeface="Tahoma"/>
               </a:rPr>
@@ -11288,7 +11240,7 @@
             <a:r>
               <a:rPr sz="1100" b="1" i="0">
                 <a:solidFill>
-                  <a:srgbClr val="C0561E"/>
+                  <a:srgbClr val="D95323"/>
                 </a:solidFill>
                 <a:latin typeface="Tahoma"/>
               </a:rPr>
@@ -11312,7 +11264,7 @@
             <a:avLst/>
           </a:prstGeom>
           <a:solidFill>
-            <a:srgbClr val="ECF1E9"/>
+            <a:srgbClr val="F2F2F2"/>
           </a:solidFill>
           <a:ln>
             <a:noFill/>
@@ -11356,7 +11308,7 @@
             <a:avLst/>
           </a:prstGeom>
           <a:solidFill>
-            <a:srgbClr val="C0561E"/>
+            <a:srgbClr val="D95323"/>
           </a:solidFill>
           <a:ln>
             <a:noFill/>
@@ -11460,7 +11412,7 @@
             <a:r>
               <a:rPr sz="1200" b="1" i="0">
                 <a:solidFill>
-                  <a:srgbClr val="0D3D14"/>
+                  <a:srgbClr val="068734"/>
                 </a:solidFill>
                 <a:latin typeface="Tahoma"/>
               </a:rPr>
@@ -11502,7 +11454,7 @@
             <a:r>
               <a:rPr sz="1200" b="0" i="0">
                 <a:solidFill>
-                  <a:srgbClr val="2C5F2D"/>
+                  <a:srgbClr val="068734"/>
                 </a:solidFill>
                 <a:latin typeface="Tahoma"/>
               </a:rPr>
@@ -11586,7 +11538,7 @@
             <a:r>
               <a:rPr sz="1100" b="1" i="0">
                 <a:solidFill>
-                  <a:srgbClr val="C0561E"/>
+                  <a:srgbClr val="D95323"/>
                 </a:solidFill>
                 <a:latin typeface="Tahoma"/>
               </a:rPr>
@@ -11654,7 +11606,7 @@
             <a:avLst/>
           </a:prstGeom>
           <a:solidFill>
-            <a:srgbClr val="C0561E"/>
+            <a:srgbClr val="D95323"/>
           </a:solidFill>
           <a:ln>
             <a:noFill/>
@@ -11758,7 +11710,7 @@
             <a:r>
               <a:rPr sz="1200" b="1" i="0">
                 <a:solidFill>
-                  <a:srgbClr val="0D3D14"/>
+                  <a:srgbClr val="068734"/>
                 </a:solidFill>
                 <a:latin typeface="Tahoma"/>
               </a:rPr>
@@ -11800,7 +11752,7 @@
             <a:r>
               <a:rPr sz="1200" b="0" i="0">
                 <a:solidFill>
-                  <a:srgbClr val="2C5F2D"/>
+                  <a:srgbClr val="068734"/>
                 </a:solidFill>
                 <a:latin typeface="Tahoma"/>
               </a:rPr>
@@ -11884,7 +11836,7 @@
             <a:r>
               <a:rPr sz="1100" b="1" i="0">
                 <a:solidFill>
-                  <a:srgbClr val="C0561E"/>
+                  <a:srgbClr val="D95323"/>
                 </a:solidFill>
                 <a:latin typeface="Tahoma"/>
               </a:rPr>
@@ -11908,7 +11860,7 @@
             <a:avLst/>
           </a:prstGeom>
           <a:solidFill>
-            <a:srgbClr val="ECF1E9"/>
+            <a:srgbClr val="F2F2F2"/>
           </a:solidFill>
           <a:ln>
             <a:noFill/>
@@ -11952,7 +11904,7 @@
             <a:avLst/>
           </a:prstGeom>
           <a:solidFill>
-            <a:srgbClr val="C0561E"/>
+            <a:srgbClr val="D95323"/>
           </a:solidFill>
           <a:ln>
             <a:noFill/>
@@ -12056,7 +12008,7 @@
             <a:r>
               <a:rPr sz="1200" b="1" i="0">
                 <a:solidFill>
-                  <a:srgbClr val="0D3D14"/>
+                  <a:srgbClr val="068734"/>
                 </a:solidFill>
                 <a:latin typeface="Tahoma"/>
               </a:rPr>
@@ -12098,7 +12050,7 @@
             <a:r>
               <a:rPr sz="1200" b="0" i="0">
                 <a:solidFill>
-                  <a:srgbClr val="2C5F2D"/>
+                  <a:srgbClr val="068734"/>
                 </a:solidFill>
                 <a:latin typeface="Tahoma"/>
               </a:rPr>
@@ -12182,7 +12134,7 @@
             <a:r>
               <a:rPr sz="1100" b="1" i="0">
                 <a:solidFill>
-                  <a:srgbClr val="C0561E"/>
+                  <a:srgbClr val="D95323"/>
                 </a:solidFill>
                 <a:latin typeface="Tahoma"/>
               </a:rPr>
@@ -12191,6 +12143,30 @@
           </a:p>
         </p:txBody>
       </p:sp>
+      <p:pic>
+        <p:nvPicPr>
+          <p:cNvPr id="62" name="Picture 61" descr="logo_r01.png"/>
+          <p:cNvPicPr>
+            <a:picLocks noChangeAspect="1"/>
+          </p:cNvPicPr>
+          <p:nvPr/>
+        </p:nvPicPr>
+        <p:blipFill>
+          <a:blip r:embed="rId3"/>
+          <a:stretch>
+            <a:fillRect/>
+          </a:stretch>
+        </p:blipFill>
+        <p:spPr>
+          <a:xfrm>
+            <a:off x="249631" y="6448348"/>
+            <a:ext cx="237744" cy="237744"/>
+          </a:xfrm>
+          <a:prstGeom prst="rect">
+            <a:avLst/>
+          </a:prstGeom>
+        </p:spPr>
+      </p:pic>
     </p:spTree>
   </p:cSld>
   <p:clrMapOvr>
@@ -12209,30 +12185,6 @@
         <p:nvPr/>
       </p:nvGrpSpPr>
       <p:grpSpPr/>
-      <p:pic>
-        <p:nvPicPr>
-          <p:cNvPr id="2" name="Picture 1" descr="logo_footer.png"/>
-          <p:cNvPicPr>
-            <a:picLocks noChangeAspect="1"/>
-          </p:cNvPicPr>
-          <p:nvPr/>
-        </p:nvPicPr>
-        <p:blipFill>
-          <a:blip r:embed="rId2"/>
-          <a:stretch>
-            <a:fillRect/>
-          </a:stretch>
-        </p:blipFill>
-        <p:spPr>
-          <a:xfrm>
-            <a:off x="384048" y="6327648"/>
-            <a:ext cx="365760" cy="384048"/>
-          </a:xfrm>
-          <a:prstGeom prst="rect">
-            <a:avLst/>
-          </a:prstGeom>
-        </p:spPr>
-      </p:pic>
       <p:sp>
         <p:nvSpPr>
           <p:cNvPr id="3" name="TextBox 2"/>
@@ -12241,32 +12193,32 @@
         </p:nvSpPr>
         <p:spPr>
           <a:xfrm>
-            <a:off x="786384" y="6327648"/>
-            <a:ext cx="4114800" cy="411480"/>
-          </a:xfrm>
-          <a:prstGeom prst="rect">
-            <a:avLst/>
-          </a:prstGeom>
-          <a:noFill/>
-        </p:spPr>
-        <p:txBody>
-          <a:bodyPr wrap="square" anchor="ctr" lIns="27432" rIns="27432" tIns="9144" bIns="9144">
-            <a:spAutoFit/>
-          </a:bodyPr>
-          <a:lstStyle/>
-          <a:p>
-            <a:pPr algn="l">
-              <a:spcBef>
-                <a:spcPts val="0"/>
-              </a:spcBef>
-              <a:spcAft>
-                <a:spcPts val="200"/>
-              </a:spcAft>
-            </a:pPr>
-            <a:r>
-              <a:rPr sz="1300" b="1" i="0">
-                <a:solidFill>
-                  <a:srgbClr val="0D3D14"/>
+            <a:off x="566928" y="6353251"/>
+            <a:ext cx="3246120" cy="400507"/>
+          </a:xfrm>
+          <a:prstGeom prst="rect">
+            <a:avLst/>
+          </a:prstGeom>
+          <a:noFill/>
+        </p:spPr>
+        <p:txBody>
+          <a:bodyPr wrap="square" anchor="ctr" lIns="27432" rIns="27432" tIns="9144" bIns="9144">
+            <a:spAutoFit/>
+          </a:bodyPr>
+          <a:lstStyle/>
+          <a:p>
+            <a:pPr algn="l">
+              <a:spcBef>
+                <a:spcPts val="0"/>
+              </a:spcBef>
+              <a:spcAft>
+                <a:spcPts val="200"/>
+              </a:spcAft>
+            </a:pPr>
+            <a:r>
+              <a:rPr sz="2000" b="1" i="0">
+                <a:solidFill>
+                  <a:srgbClr val="068734"/>
                 </a:solidFill>
                 <a:latin typeface="Tahoma"/>
               </a:rPr>
@@ -12283,8 +12235,8 @@
         </p:nvSpPr>
         <p:spPr>
           <a:xfrm>
-            <a:off x="11430000" y="6355080"/>
-            <a:ext cx="594360" cy="365760"/>
+            <a:off x="9400032" y="6510528"/>
+            <a:ext cx="2514600" cy="292608"/>
           </a:xfrm>
           <a:prstGeom prst="rect">
             <a:avLst/>
@@ -12308,7 +12260,7 @@
             <a:r>
               <a:rPr sz="1200" b="0" i="0">
                 <a:solidFill>
-                  <a:srgbClr val="555555"/>
+                  <a:srgbClr val="068734"/>
                 </a:solidFill>
                 <a:latin typeface="Tahoma"/>
               </a:rPr>
@@ -12350,7 +12302,7 @@
             <a:r>
               <a:rPr sz="3400" b="1" i="0">
                 <a:solidFill>
-                  <a:srgbClr val="0D3D14"/>
+                  <a:srgbClr val="068734"/>
                 </a:solidFill>
                 <a:latin typeface="Tahoma"/>
               </a:rPr>
@@ -12392,7 +12344,7 @@
             <a:r>
               <a:rPr sz="1900" b="1" i="0">
                 <a:solidFill>
-                  <a:srgbClr val="2C5F2D"/>
+                  <a:srgbClr val="068734"/>
                 </a:solidFill>
                 <a:latin typeface="Tahoma"/>
               </a:rPr>
@@ -12586,7 +12538,7 @@
             <a:avLst/>
           </a:prstGeom>
           <a:solidFill>
-            <a:srgbClr val="ECF1E9"/>
+            <a:srgbClr val="F2F2F2"/>
           </a:solidFill>
           <a:ln>
             <a:noFill/>
@@ -12648,7 +12600,7 @@
             <a:r>
               <a:rPr sz="1300" b="1" i="0">
                 <a:solidFill>
-                  <a:srgbClr val="0D3D14"/>
+                  <a:srgbClr val="068734"/>
                 </a:solidFill>
                 <a:latin typeface="Tahoma"/>
               </a:rPr>
@@ -12690,7 +12642,7 @@
             <a:r>
               <a:rPr sz="1500" b="1" i="0">
                 <a:solidFill>
-                  <a:srgbClr val="C0561E"/>
+                  <a:srgbClr val="D95323"/>
                 </a:solidFill>
                 <a:latin typeface="Tahoma"/>
               </a:rPr>
@@ -12732,7 +12684,7 @@
             <a:r>
               <a:rPr sz="1500" b="1" i="0">
                 <a:solidFill>
-                  <a:srgbClr val="2C5F2D"/>
+                  <a:srgbClr val="068734"/>
                 </a:solidFill>
                 <a:latin typeface="Tahoma"/>
               </a:rPr>
@@ -12818,7 +12770,7 @@
             <a:r>
               <a:rPr sz="1300" b="1" i="0">
                 <a:solidFill>
-                  <a:srgbClr val="0D3D14"/>
+                  <a:srgbClr val="068734"/>
                 </a:solidFill>
                 <a:latin typeface="Tahoma"/>
               </a:rPr>
@@ -12860,7 +12812,7 @@
             <a:r>
               <a:rPr sz="1500" b="1" i="0">
                 <a:solidFill>
-                  <a:srgbClr val="C0561E"/>
+                  <a:srgbClr val="D95323"/>
                 </a:solidFill>
                 <a:latin typeface="Tahoma"/>
               </a:rPr>
@@ -12902,7 +12854,7 @@
             <a:r>
               <a:rPr sz="1500" b="1" i="0">
                 <a:solidFill>
-                  <a:srgbClr val="2C5F2D"/>
+                  <a:srgbClr val="068734"/>
                 </a:solidFill>
                 <a:latin typeface="Tahoma"/>
               </a:rPr>
@@ -12926,7 +12878,7 @@
             <a:avLst/>
           </a:prstGeom>
           <a:solidFill>
-            <a:srgbClr val="ECF1E9"/>
+            <a:srgbClr val="F2F2F2"/>
           </a:solidFill>
           <a:ln>
             <a:noFill/>
@@ -12988,7 +12940,7 @@
             <a:r>
               <a:rPr sz="1300" b="1" i="0">
                 <a:solidFill>
-                  <a:srgbClr val="0D3D14"/>
+                  <a:srgbClr val="068734"/>
                 </a:solidFill>
                 <a:latin typeface="Tahoma"/>
               </a:rPr>
@@ -13030,7 +12982,7 @@
             <a:r>
               <a:rPr sz="1500" b="1" i="0">
                 <a:solidFill>
-                  <a:srgbClr val="C0561E"/>
+                  <a:srgbClr val="D95323"/>
                 </a:solidFill>
                 <a:latin typeface="Tahoma"/>
               </a:rPr>
@@ -13072,7 +13024,7 @@
             <a:r>
               <a:rPr sz="1500" b="1" i="0">
                 <a:solidFill>
-                  <a:srgbClr val="2C5F2D"/>
+                  <a:srgbClr val="068734"/>
                 </a:solidFill>
                 <a:latin typeface="Tahoma"/>
               </a:rPr>
@@ -13158,7 +13110,7 @@
             <a:r>
               <a:rPr sz="1300" b="1" i="0">
                 <a:solidFill>
-                  <a:srgbClr val="0D3D14"/>
+                  <a:srgbClr val="068734"/>
                 </a:solidFill>
                 <a:latin typeface="Tahoma"/>
               </a:rPr>
@@ -13200,7 +13152,7 @@
             <a:r>
               <a:rPr sz="1500" b="1" i="0">
                 <a:solidFill>
-                  <a:srgbClr val="C0561E"/>
+                  <a:srgbClr val="D95323"/>
                 </a:solidFill>
                 <a:latin typeface="Tahoma"/>
               </a:rPr>
@@ -13242,7 +13194,7 @@
             <a:r>
               <a:rPr sz="1500" b="1" i="0">
                 <a:solidFill>
-                  <a:srgbClr val="2C5F2D"/>
+                  <a:srgbClr val="068734"/>
                 </a:solidFill>
                 <a:latin typeface="Tahoma"/>
               </a:rPr>
@@ -13370,7 +13322,7 @@
             <a:r>
               <a:rPr sz="1400" b="1" i="0">
                 <a:solidFill>
-                  <a:srgbClr val="0D3D14"/>
+                  <a:srgbClr val="068734"/>
                 </a:solidFill>
                 <a:latin typeface="Tahoma"/>
               </a:rPr>
@@ -13379,6 +13331,30 @@
           </a:p>
         </p:txBody>
       </p:sp>
+      <p:pic>
+        <p:nvPicPr>
+          <p:cNvPr id="30" name="Picture 29" descr="logo_r01.png"/>
+          <p:cNvPicPr>
+            <a:picLocks noChangeAspect="1"/>
+          </p:cNvPicPr>
+          <p:nvPr/>
+        </p:nvPicPr>
+        <p:blipFill>
+          <a:blip r:embed="rId3"/>
+          <a:stretch>
+            <a:fillRect/>
+          </a:stretch>
+        </p:blipFill>
+        <p:spPr>
+          <a:xfrm>
+            <a:off x="249631" y="6448348"/>
+            <a:ext cx="237744" cy="237744"/>
+          </a:xfrm>
+          <a:prstGeom prst="rect">
+            <a:avLst/>
+          </a:prstGeom>
+        </p:spPr>
+      </p:pic>
     </p:spTree>
   </p:cSld>
   <p:clrMapOvr>
@@ -13397,24 +13373,108 @@
         <p:nvPr/>
       </p:nvGrpSpPr>
       <p:grpSpPr/>
+      <p:sp>
+        <p:nvSpPr>
+          <p:cNvPr id="3" name="TextBox 2"/>
+          <p:cNvSpPr txBox="1"/>
+          <p:nvPr/>
+        </p:nvSpPr>
+        <p:spPr>
+          <a:xfrm>
+            <a:off x="914400" y="2651760"/>
+            <a:ext cx="10332720" cy="1097280"/>
+          </a:xfrm>
+          <a:prstGeom prst="rect">
+            <a:avLst/>
+          </a:prstGeom>
+          <a:noFill/>
+        </p:spPr>
+        <p:txBody>
+          <a:bodyPr wrap="square" anchor="t" lIns="27432" rIns="27432" tIns="9144" bIns="9144">
+            <a:spAutoFit/>
+          </a:bodyPr>
+          <a:lstStyle/>
+          <a:p>
+            <a:pPr algn="ctr">
+              <a:spcBef>
+                <a:spcPts val="0"/>
+              </a:spcBef>
+              <a:spcAft>
+                <a:spcPts val="200"/>
+              </a:spcAft>
+            </a:pPr>
+            <a:r>
+              <a:rPr sz="3400" b="1" i="0">
+                <a:solidFill>
+                  <a:srgbClr val="068734"/>
+                </a:solidFill>
+                <a:latin typeface="Tahoma"/>
+              </a:rPr>
+              <a:t>ระบบเรียกงานให้แล้ว — เหลือแค่เรากดรับ</a:t>
+            </a:r>
+          </a:p>
+        </p:txBody>
+      </p:sp>
+      <p:sp>
+        <p:nvSpPr>
+          <p:cNvPr id="4" name="TextBox 3"/>
+          <p:cNvSpPr txBox="1"/>
+          <p:nvPr/>
+        </p:nvSpPr>
+        <p:spPr>
+          <a:xfrm>
+            <a:off x="914400" y="3840480"/>
+            <a:ext cx="10332720" cy="731520"/>
+          </a:xfrm>
+          <a:prstGeom prst="rect">
+            <a:avLst/>
+          </a:prstGeom>
+          <a:noFill/>
+        </p:spPr>
+        <p:txBody>
+          <a:bodyPr wrap="square" anchor="t" lIns="27432" rIns="27432" tIns="9144" bIns="9144">
+            <a:spAutoFit/>
+          </a:bodyPr>
+          <a:lstStyle/>
+          <a:p>
+            <a:pPr algn="ctr">
+              <a:spcBef>
+                <a:spcPts val="0"/>
+              </a:spcBef>
+              <a:spcAft>
+                <a:spcPts val="200"/>
+              </a:spcAft>
+            </a:pPr>
+            <a:r>
+              <a:rPr sz="2200" b="1" i="1">
+                <a:solidFill>
+                  <a:srgbClr val="D95323"/>
+                </a:solidFill>
+                <a:latin typeface="Tahoma"/>
+              </a:rPr>
+              <a:t>Before We Build Parts, We Build People</a:t>
+            </a:r>
+          </a:p>
+        </p:txBody>
+      </p:sp>
       <p:pic>
         <p:nvPicPr>
-          <p:cNvPr id="2" name="Picture 1" descr="bg_title.png"/>
+          <p:cNvPr id="5" name="Picture 4" descr="logo_r01.png"/>
           <p:cNvPicPr>
             <a:picLocks noChangeAspect="1"/>
           </p:cNvPicPr>
           <p:nvPr/>
         </p:nvPicPr>
         <p:blipFill>
-          <a:blip r:embed="rId2"/>
+          <a:blip r:embed="rId3"/>
           <a:stretch>
             <a:fillRect/>
           </a:stretch>
         </p:blipFill>
         <p:spPr>
           <a:xfrm>
-            <a:off x="0" y="0"/>
-            <a:ext cx="12191695" cy="6858000"/>
+            <a:off x="249631" y="6448348"/>
+            <a:ext cx="237744" cy="237744"/>
           </a:xfrm>
           <a:prstGeom prst="rect">
             <a:avLst/>
@@ -13423,14 +13483,56 @@
       </p:pic>
       <p:sp>
         <p:nvSpPr>
-          <p:cNvPr id="3" name="TextBox 2"/>
-          <p:cNvSpPr txBox="1"/>
-          <p:nvPr/>
-        </p:nvSpPr>
-        <p:spPr>
-          <a:xfrm>
-            <a:off x="914400" y="2651760"/>
-            <a:ext cx="10332720" cy="1097280"/>
+          <p:cNvPr id="6" name="TextBox 5"/>
+          <p:cNvSpPr txBox="1"/>
+          <p:nvPr/>
+        </p:nvSpPr>
+        <p:spPr>
+          <a:xfrm>
+            <a:off x="566928" y="6353251"/>
+            <a:ext cx="3246120" cy="400507"/>
+          </a:xfrm>
+          <a:prstGeom prst="rect">
+            <a:avLst/>
+          </a:prstGeom>
+          <a:noFill/>
+        </p:spPr>
+        <p:txBody>
+          <a:bodyPr wrap="square" anchor="ctr" lIns="27432" rIns="27432" tIns="9144" bIns="9144">
+            <a:spAutoFit/>
+          </a:bodyPr>
+          <a:lstStyle/>
+          <a:p>
+            <a:pPr algn="l">
+              <a:spcBef>
+                <a:spcPts val="0"/>
+              </a:spcBef>
+              <a:spcAft>
+                <a:spcPts val="200"/>
+              </a:spcAft>
+            </a:pPr>
+            <a:r>
+              <a:rPr sz="2000" b="1" i="0">
+                <a:solidFill>
+                  <a:srgbClr val="068734"/>
+                </a:solidFill>
+                <a:latin typeface="Tahoma"/>
+              </a:rPr>
+              <a:t>THAI SUMMIT GROUP</a:t>
+            </a:r>
+          </a:p>
+        </p:txBody>
+      </p:sp>
+      <p:sp>
+        <p:nvSpPr>
+          <p:cNvPr id="7" name="TextBox 6"/>
+          <p:cNvSpPr txBox="1"/>
+          <p:nvPr/>
+        </p:nvSpPr>
+        <p:spPr>
+          <a:xfrm>
+            <a:off x="9400032" y="6510528"/>
+            <a:ext cx="2514600" cy="292608"/>
           </a:xfrm>
           <a:prstGeom prst="rect">
             <a:avLst/>
@@ -13443,64 +13545,22 @@
           </a:bodyPr>
           <a:lstStyle/>
           <a:p>
-            <a:pPr algn="ctr">
-              <a:spcBef>
-                <a:spcPts val="0"/>
-              </a:spcBef>
-              <a:spcAft>
-                <a:spcPts val="200"/>
-              </a:spcAft>
-            </a:pPr>
-            <a:r>
-              <a:rPr sz="3400" b="1" i="0">
-                <a:solidFill>
-                  <a:srgbClr val="FFFFFF"/>
-                </a:solidFill>
-                <a:latin typeface="Tahoma"/>
-              </a:rPr>
-              <a:t>ระบบเรียกงานให้แล้ว — เหลือแค่เรากดรับ</a:t>
-            </a:r>
-          </a:p>
-        </p:txBody>
-      </p:sp>
-      <p:sp>
-        <p:nvSpPr>
-          <p:cNvPr id="4" name="TextBox 3"/>
-          <p:cNvSpPr txBox="1"/>
-          <p:nvPr/>
-        </p:nvSpPr>
-        <p:spPr>
-          <a:xfrm>
-            <a:off x="914400" y="3840480"/>
-            <a:ext cx="10332720" cy="731520"/>
-          </a:xfrm>
-          <a:prstGeom prst="rect">
-            <a:avLst/>
-          </a:prstGeom>
-          <a:noFill/>
-        </p:spPr>
-        <p:txBody>
-          <a:bodyPr wrap="square" anchor="t" lIns="27432" rIns="27432" tIns="9144" bIns="9144">
-            <a:spAutoFit/>
-          </a:bodyPr>
-          <a:lstStyle/>
-          <a:p>
-            <a:pPr algn="ctr">
-              <a:spcBef>
-                <a:spcPts val="0"/>
-              </a:spcBef>
-              <a:spcAft>
-                <a:spcPts val="200"/>
-              </a:spcAft>
-            </a:pPr>
-            <a:r>
-              <a:rPr sz="2200" b="1" i="1">
-                <a:solidFill>
-                  <a:srgbClr val="EBD9B0"/>
-                </a:solidFill>
-                <a:latin typeface="Tahoma"/>
-              </a:rPr>
-              <a:t>Before We Build Parts, We Build People</a:t>
+            <a:pPr algn="r">
+              <a:spcBef>
+                <a:spcPts val="0"/>
+              </a:spcBef>
+              <a:spcAft>
+                <a:spcPts val="200"/>
+              </a:spcAft>
+            </a:pPr>
+            <a:r>
+              <a:rPr sz="1200" b="0" i="0">
+                <a:solidFill>
+                  <a:srgbClr val="068734"/>
+                </a:solidFill>
+                <a:latin typeface="Tahoma"/>
+              </a:rPr>
+              <a:t>8</a:t>
             </a:r>
           </a:p>
         </p:txBody>
